--- a/output/apresentacao_seazone_itapema.pptx
+++ b/output/apresentacao_seazone_itapema.pptx
@@ -12,10 +12,6 @@
     <p:sldId id="260" r:id="rId11"/>
     <p:sldId id="261" r:id="rId12"/>
     <p:sldId id="262" r:id="rId13"/>
-    <p:sldId id="263" r:id="rId14"/>
-    <p:sldId id="264" r:id="rId15"/>
-    <p:sldId id="265" r:id="rId16"/>
-    <p:sldId id="266" r:id="rId17"/>
   </p:sldIdLst>
   <p:sldSz cx="12191695" cy="6858000" type="screen4x3"/>
   <p:notesSz cx="6858000" cy="9144000"/>
@@ -3150,8 +3146,8 @@
         </p:nvSpPr>
         <p:spPr>
           <a:xfrm>
-            <a:off x="0" y="5577840"/>
-            <a:ext cx="12191695" cy="1280160"/>
+            <a:off x="0" y="5532120"/>
+            <a:ext cx="12191695" cy="1325880"/>
           </a:xfrm>
           <a:prstGeom prst="rect">
             <a:avLst/>
@@ -3194,7 +3190,7 @@
         </p:nvSpPr>
         <p:spPr>
           <a:xfrm>
-            <a:off x="822960" y="1097280"/>
+            <a:off x="822960" y="914400"/>
             <a:ext cx="10515600" cy="457200"/>
           </a:xfrm>
           <a:prstGeom prst="rect">
@@ -3214,13 +3210,13 @@
               </a:spcAft>
             </a:pPr>
             <a:r>
-              <a:rPr sz="1400" b="1">
+              <a:rPr sz="1300" b="1">
                 <a:solidFill>
                   <a:srgbClr val="A9BCDD"/>
                 </a:solidFill>
                 <a:latin typeface="Calibri"/>
               </a:rPr>
-              <a:t>HACKATHON · JOVENS TALENTOS AI BUILDER 2026</a:t>
+              <a:t>HACKATHON · JOVENS TALENTOS AI BUILDER 2026 · SE AZONE</a:t>
             </a:r>
           </a:p>
         </p:txBody>
@@ -3233,8 +3229,8 @@
         </p:nvSpPr>
         <p:spPr>
           <a:xfrm>
-            <a:off x="822960" y="1645920"/>
-            <a:ext cx="10515600" cy="1645920"/>
+            <a:off x="822960" y="1417320"/>
+            <a:ext cx="10515600" cy="1463040"/>
           </a:xfrm>
           <a:prstGeom prst="rect">
             <a:avLst/>
@@ -3253,13 +3249,13 @@
               </a:spcAft>
             </a:pPr>
             <a:r>
-              <a:rPr sz="4200" b="1">
+              <a:rPr sz="3800" b="1">
                 <a:solidFill>
                   <a:srgbClr val="FFFFFF"/>
                 </a:solidFill>
                 <a:latin typeface="Calibri"/>
               </a:rPr>
-              <a:t>Recomendação de Investimento Imobiliário</a:t>
+              <a:t>Recomendação: apartamentos 2Q</a:t>
             </a:r>
           </a:p>
           <a:p>
@@ -3269,13 +3265,13 @@
               </a:spcAft>
             </a:pPr>
             <a:r>
-              <a:rPr sz="4200" b="1">
+              <a:rPr sz="3800" b="1">
                 <a:solidFill>
                   <a:srgbClr val="FC6058"/>
                 </a:solidFill>
                 <a:latin typeface="Calibri"/>
               </a:rPr>
-              <a:t>em Itapema (SC)</a:t>
+              <a:t>começando por Morretes.</a:t>
             </a:r>
           </a:p>
         </p:txBody>
@@ -3288,8 +3284,8 @@
         </p:nvSpPr>
         <p:spPr>
           <a:xfrm>
-            <a:off x="822960" y="3383280"/>
-            <a:ext cx="10058400" cy="548640"/>
+            <a:off x="822960" y="3108960"/>
+            <a:ext cx="10515600" cy="1280160"/>
           </a:xfrm>
           <a:prstGeom prst="rect">
             <a:avLst/>
@@ -3314,32 +3310,9 @@
                 </a:solidFill>
                 <a:latin typeface="Calibri"/>
               </a:rPr>
-              <a:t>Análise de mercado Airbnb + VivaReal | Decisão com apoio de IA</a:t>
-            </a:r>
-          </a:p>
-        </p:txBody>
-      </p:sp>
-      <p:sp>
-        <p:nvSpPr>
-          <p:cNvPr id="7" name="TextBox 6"/>
-          <p:cNvSpPr txBox="1"/>
-          <p:nvPr/>
-        </p:nvSpPr>
-        <p:spPr>
-          <a:xfrm>
-            <a:off x="822960" y="4023360"/>
-            <a:ext cx="10515600" cy="1280160"/>
-          </a:xfrm>
-          <a:prstGeom prst="rect">
-            <a:avLst/>
-          </a:prstGeom>
-          <a:noFill/>
-        </p:spPr>
-        <p:txBody>
-          <a:bodyPr wrap="square" anchor="t" lIns="0" rIns="0" tIns="0" bIns="0">
-            <a:spAutoFit/>
-          </a:bodyPr>
-          <a:lstStyle/>
+              <a:t>Retorno líquido de encargos de 10,8% a.a. (ocupação 55%) · ticket acessível · alta confiabilidade</a:t>
+            </a:r>
+          </a:p>
           <a:p>
             <a:pPr algn="l">
               <a:spcAft>
@@ -3347,27 +3320,27 @@
               </a:spcAft>
             </a:pPr>
             <a:r>
-              <a:rPr sz="1600" b="0">
+              <a:rPr sz="1500" b="0">
                 <a:solidFill>
                   <a:srgbClr val="A9BCDD"/>
                 </a:solidFill>
                 <a:latin typeface="Calibri"/>
               </a:rPr>
-              <a:t>4 perguntas → 1 recomendação, com retorno estimado e posição sobre a tese dos compactos</a:t>
-            </a:r>
-          </a:p>
-        </p:txBody>
-      </p:sp>
-      <p:sp>
-        <p:nvSpPr>
-          <p:cNvPr id="8" name="TextBox 7"/>
+              <a:t>Itapema (SC) · Airbnb + VivaReal · decisão apoiada por IA</a:t>
+            </a:r>
+          </a:p>
+        </p:txBody>
+      </p:sp>
+      <p:sp>
+        <p:nvSpPr>
+          <p:cNvPr id="7" name="TextBox 6"/>
           <p:cNvSpPr txBox="1"/>
           <p:nvPr/>
         </p:nvSpPr>
         <p:spPr>
           <a:xfrm>
-            <a:off x="822960" y="5897880"/>
-            <a:ext cx="10515600" cy="548640"/>
+            <a:off x="822960" y="5852160"/>
+            <a:ext cx="10515600" cy="731520"/>
           </a:xfrm>
           <a:prstGeom prst="rect">
             <a:avLst/>
@@ -3386,801 +3359,13 @@
               </a:spcAft>
             </a:pPr>
             <a:r>
-              <a:rPr sz="1400" b="0">
+              <a:rPr sz="1300" b="0">
                 <a:solidFill>
                   <a:srgbClr val="FFFFFF"/>
                 </a:solidFill>
                 <a:latin typeface="Calibri"/>
               </a:rPr>
-              <a:t>Relatório completo: relatorio.md  ·  Processo com IA: ai-log/  ·  Projeto: github.com/escalant-e/jt2026-ricardo-escalante</a:t>
-            </a:r>
-          </a:p>
-        </p:txBody>
-      </p:sp>
-    </p:spTree>
-  </p:cSld>
-  <p:clrMapOvr>
-    <a:masterClrMapping/>
-  </p:clrMapOvr>
-</p:sld>
-</file>
-
-<file path=ppt/slides/slide10.xml><?xml version="1.0" encoding="utf-8"?>
-<p:sld xmlns:a="http://schemas.openxmlformats.org/drawingml/2006/main" xmlns:p="http://schemas.openxmlformats.org/presentationml/2006/main" xmlns:r="http://schemas.openxmlformats.org/officeDocument/2006/relationships">
-  <p:cSld>
-    <p:spTree>
-      <p:nvGrpSpPr>
-        <p:cNvPr id="1" name=""/>
-        <p:cNvGrpSpPr/>
-        <p:nvPr/>
-      </p:nvGrpSpPr>
-      <p:grpSpPr/>
-      <p:sp>
-        <p:nvSpPr>
-          <p:cNvPr id="2" name="Rectangle 1"/>
-          <p:cNvSpPr/>
-          <p:nvPr/>
-        </p:nvSpPr>
-        <p:spPr>
-          <a:xfrm>
-            <a:off x="0" y="0"/>
-            <a:ext cx="12191695" cy="1143000"/>
-          </a:xfrm>
-          <a:prstGeom prst="rect">
-            <a:avLst/>
-          </a:prstGeom>
-          <a:solidFill>
-            <a:srgbClr val="0E1B33"/>
-          </a:solidFill>
-          <a:ln>
-            <a:noFill/>
-          </a:ln>
-          <a:effectLst/>
-        </p:spPr>
-        <p:style>
-          <a:lnRef idx="1">
-            <a:schemeClr val="accent1"/>
-          </a:lnRef>
-          <a:fillRef idx="3">
-            <a:schemeClr val="accent1"/>
-          </a:fillRef>
-          <a:effectRef idx="2">
-            <a:schemeClr val="accent1"/>
-          </a:effectRef>
-          <a:fontRef idx="minor">
-            <a:schemeClr val="lt1"/>
-          </a:fontRef>
-        </p:style>
-        <p:txBody>
-          <a:bodyPr rtlCol="0" anchor="ctr"/>
-          <a:lstStyle/>
-          <a:p>
-            <a:pPr algn="ctr"/>
-          </a:p>
-        </p:txBody>
-      </p:sp>
-      <p:sp>
-        <p:nvSpPr>
-          <p:cNvPr id="3" name="Rectangle 2"/>
-          <p:cNvSpPr/>
-          <p:nvPr/>
-        </p:nvSpPr>
-        <p:spPr>
-          <a:xfrm>
-            <a:off x="411480" y="301752"/>
-            <a:ext cx="82296" cy="548640"/>
-          </a:xfrm>
-          <a:prstGeom prst="rect">
-            <a:avLst/>
-          </a:prstGeom>
-          <a:solidFill>
-            <a:srgbClr val="FC6058"/>
-          </a:solidFill>
-          <a:ln>
-            <a:noFill/>
-          </a:ln>
-          <a:effectLst/>
-        </p:spPr>
-        <p:style>
-          <a:lnRef idx="1">
-            <a:schemeClr val="accent1"/>
-          </a:lnRef>
-          <a:fillRef idx="3">
-            <a:schemeClr val="accent1"/>
-          </a:fillRef>
-          <a:effectRef idx="2">
-            <a:schemeClr val="accent1"/>
-          </a:effectRef>
-          <a:fontRef idx="minor">
-            <a:schemeClr val="lt1"/>
-          </a:fontRef>
-        </p:style>
-        <p:txBody>
-          <a:bodyPr rtlCol="0" anchor="ctr"/>
-          <a:lstStyle/>
-          <a:p>
-            <a:pPr algn="ctr"/>
-          </a:p>
-        </p:txBody>
-      </p:sp>
-      <p:sp>
-        <p:nvSpPr>
-          <p:cNvPr id="4" name="TextBox 3"/>
-          <p:cNvSpPr txBox="1"/>
-          <p:nvPr/>
-        </p:nvSpPr>
-        <p:spPr>
-          <a:xfrm>
-            <a:off x="685800" y="201168"/>
-            <a:ext cx="10058400" cy="365760"/>
-          </a:xfrm>
-          <a:prstGeom prst="rect">
-            <a:avLst/>
-          </a:prstGeom>
-          <a:noFill/>
-        </p:spPr>
-        <p:txBody>
-          <a:bodyPr wrap="square" anchor="t" lIns="0" rIns="0" tIns="0" bIns="0">
-            <a:spAutoFit/>
-          </a:bodyPr>
-          <a:lstStyle/>
-          <a:p>
-            <a:pPr algn="l">
-              <a:spcAft>
-                <a:spcPts val="600"/>
-              </a:spcAft>
-            </a:pPr>
-            <a:r>
-              <a:rPr sz="1300" b="1">
-                <a:solidFill>
-                  <a:srgbClr val="A9BCDD"/>
-                </a:solidFill>
-                <a:latin typeface="Calibri"/>
-              </a:rPr>
-              <a:t>PRÓXIMOS PASSOS</a:t>
-            </a:r>
-          </a:p>
-        </p:txBody>
-      </p:sp>
-      <p:sp>
-        <p:nvSpPr>
-          <p:cNvPr id="5" name="TextBox 4"/>
-          <p:cNvSpPr txBox="1"/>
-          <p:nvPr/>
-        </p:nvSpPr>
-        <p:spPr>
-          <a:xfrm>
-            <a:off x="685800" y="502920"/>
-            <a:ext cx="10515600" cy="640080"/>
-          </a:xfrm>
-          <a:prstGeom prst="rect">
-            <a:avLst/>
-          </a:prstGeom>
-          <a:noFill/>
-        </p:spPr>
-        <p:txBody>
-          <a:bodyPr wrap="square" anchor="t" lIns="0" rIns="0" tIns="0" bIns="0">
-            <a:spAutoFit/>
-          </a:bodyPr>
-          <a:lstStyle/>
-          <a:p>
-            <a:pPr algn="l">
-              <a:spcAft>
-                <a:spcPts val="600"/>
-              </a:spcAft>
-            </a:pPr>
-            <a:r>
-              <a:rPr sz="3000" b="1">
-                <a:solidFill>
-                  <a:srgbClr val="FFFFFF"/>
-                </a:solidFill>
-                <a:latin typeface="Calibri"/>
-              </a:rPr>
-              <a:t>Com mais uma semana</a:t>
-            </a:r>
-          </a:p>
-        </p:txBody>
-      </p:sp>
-      <p:sp>
-        <p:nvSpPr>
-          <p:cNvPr id="6" name="TextBox 5"/>
-          <p:cNvSpPr txBox="1"/>
-          <p:nvPr/>
-        </p:nvSpPr>
-        <p:spPr>
-          <a:xfrm>
-            <a:off x="685800" y="1554480"/>
-            <a:ext cx="10789920" cy="4206240"/>
-          </a:xfrm>
-          <a:prstGeom prst="rect">
-            <a:avLst/>
-          </a:prstGeom>
-          <a:noFill/>
-        </p:spPr>
-        <p:txBody>
-          <a:bodyPr wrap="square">
-            <a:spAutoFit/>
-          </a:bodyPr>
-          <a:lstStyle/>
-          <a:p>
-            <a:pPr>
-              <a:spcAft>
-                <a:spcPts val="1400"/>
-              </a:spcAft>
-            </a:pPr>
-            <a:r>
-              <a:rPr sz="1900" b="1">
-                <a:solidFill>
-                  <a:srgbClr val="0E1B33"/>
-                </a:solidFill>
-              </a:rPr>
-              <a:t>• Ano completo: </a:t>
-            </a:r>
-            <a:r>
-              <a:rPr sz="1900">
-                <a:solidFill>
-                  <a:srgbClr val="4A5A78"/>
-                </a:solidFill>
-              </a:rPr>
-              <a:t>calibrar sazonalidade real e ocupação/inverno (remover a maior limitação).</a:t>
-            </a:r>
-          </a:p>
-          <a:p>
-            <a:pPr>
-              <a:spcAft>
-                <a:spcPts val="1400"/>
-              </a:spcAft>
-            </a:pPr>
-            <a:r>
-              <a:rPr sz="1900" b="1">
-                <a:solidFill>
-                  <a:srgbClr val="0E1B33"/>
-                </a:solidFill>
-              </a:rPr>
-              <a:t>• Custos operacionais: </a:t>
-            </a:r>
-            <a:r>
-              <a:rPr sz="1900">
-                <a:solidFill>
-                  <a:srgbClr val="4A5A78"/>
-                </a:solidFill>
-              </a:rPr>
-              <a:t>transformar 'líquido de encargos' em NOI/cap rate completo.</a:t>
-            </a:r>
-          </a:p>
-          <a:p>
-            <a:pPr>
-              <a:spcAft>
-                <a:spcPts val="1400"/>
-              </a:spcAft>
-            </a:pPr>
-            <a:r>
-              <a:rPr sz="1900" b="1">
-                <a:solidFill>
-                  <a:srgbClr val="0E1B33"/>
-                </a:solidFill>
-              </a:rPr>
-              <a:t>• Modelo mais robusto: </a:t>
-            </a:r>
-            <a:r>
-              <a:rPr sz="1900">
-                <a:solidFill>
-                  <a:srgbClr val="4A5A78"/>
-                </a:solidFill>
-              </a:rPr>
-              <a:t>validação cruzada, VIF e variáveis derivadas (distância à praia, oferta).</a:t>
-            </a:r>
-          </a:p>
-          <a:p>
-            <a:pPr>
-              <a:spcAft>
-                <a:spcPts val="1400"/>
-              </a:spcAft>
-            </a:pPr>
-            <a:r>
-              <a:rPr sz="1900" b="1">
-                <a:solidFill>
-                  <a:srgbClr val="0E1B33"/>
-                </a:solidFill>
-              </a:rPr>
-              <a:t>• Benchmark Seazone + validação externa: </a:t>
-            </a:r>
-            <a:r>
-              <a:rPr sz="1900">
-                <a:solidFill>
-                  <a:srgbClr val="4A5A78"/>
-                </a:solidFill>
-              </a:rPr>
-              <a:t>testar a hipótese de renda da terra em Morretes com dados censitários.</a:t>
-            </a:r>
-          </a:p>
-          <a:p>
-            <a:pPr>
-              <a:spcAft>
-                <a:spcPts val="1400"/>
-              </a:spcAft>
-            </a:pPr>
-            <a:r>
-              <a:rPr sz="1900" b="1">
-                <a:solidFill>
-                  <a:srgbClr val="0E1B33"/>
-                </a:solidFill>
-              </a:rPr>
-              <a:t>• Sensibilidade: </a:t>
-            </a:r>
-            <a:r>
-              <a:rPr sz="1900">
-                <a:solidFill>
-                  <a:srgbClr val="4A5A78"/>
-                </a:solidFill>
-              </a:rPr>
-              <a:t>testar o limiar de confiabilidade (5/10/15/20) para blindar a decisão 2Q.</a:t>
-            </a:r>
-          </a:p>
-        </p:txBody>
-      </p:sp>
-      <p:sp>
-        <p:nvSpPr>
-          <p:cNvPr id="7" name="TextBox 6"/>
-          <p:cNvSpPr txBox="1"/>
-          <p:nvPr/>
-        </p:nvSpPr>
-        <p:spPr>
-          <a:xfrm>
-            <a:off x="411480" y="6446520"/>
-            <a:ext cx="4572000" cy="320040"/>
-          </a:xfrm>
-          <a:prstGeom prst="rect">
-            <a:avLst/>
-          </a:prstGeom>
-          <a:noFill/>
-        </p:spPr>
-        <p:txBody>
-          <a:bodyPr wrap="square" anchor="t" lIns="0" rIns="0" tIns="0" bIns="0">
-            <a:spAutoFit/>
-          </a:bodyPr>
-          <a:lstStyle/>
-          <a:p>
-            <a:pPr algn="l">
-              <a:spcAft>
-                <a:spcPts val="600"/>
-              </a:spcAft>
-            </a:pPr>
-            <a:r>
-              <a:rPr sz="1000" b="0">
-                <a:solidFill>
-                  <a:srgbClr val="4A5A78"/>
-                </a:solidFill>
-                <a:latin typeface="Calibri"/>
-              </a:rPr>
-              <a:t>Seazone · Hackathon Jovens Talentos AI Builder 2026</a:t>
-            </a:r>
-          </a:p>
-        </p:txBody>
-      </p:sp>
-      <p:sp>
-        <p:nvSpPr>
-          <p:cNvPr id="8" name="TextBox 7"/>
-          <p:cNvSpPr txBox="1"/>
-          <p:nvPr/>
-        </p:nvSpPr>
-        <p:spPr>
-          <a:xfrm>
-            <a:off x="11247120" y="6446520"/>
-            <a:ext cx="640080" cy="320040"/>
-          </a:xfrm>
-          <a:prstGeom prst="rect">
-            <a:avLst/>
-          </a:prstGeom>
-          <a:noFill/>
-        </p:spPr>
-        <p:txBody>
-          <a:bodyPr wrap="square" anchor="t" lIns="0" rIns="0" tIns="0" bIns="0">
-            <a:spAutoFit/>
-          </a:bodyPr>
-          <a:lstStyle/>
-          <a:p>
-            <a:pPr algn="r">
-              <a:spcAft>
-                <a:spcPts val="600"/>
-              </a:spcAft>
-            </a:pPr>
-            <a:r>
-              <a:rPr sz="1200" b="0">
-                <a:solidFill>
-                  <a:srgbClr val="4A5A78"/>
-                </a:solidFill>
-                <a:latin typeface="Calibri"/>
-              </a:rPr>
-              <a:t>10</a:t>
-            </a:r>
-          </a:p>
-        </p:txBody>
-      </p:sp>
-    </p:spTree>
-  </p:cSld>
-  <p:clrMapOvr>
-    <a:masterClrMapping/>
-  </p:clrMapOvr>
-</p:sld>
-</file>
-
-<file path=ppt/slides/slide11.xml><?xml version="1.0" encoding="utf-8"?>
-<p:sld xmlns:a="http://schemas.openxmlformats.org/drawingml/2006/main" xmlns:p="http://schemas.openxmlformats.org/presentationml/2006/main" xmlns:r="http://schemas.openxmlformats.org/officeDocument/2006/relationships">
-  <p:cSld>
-    <p:spTree>
-      <p:nvGrpSpPr>
-        <p:cNvPr id="1" name=""/>
-        <p:cNvGrpSpPr/>
-        <p:nvPr/>
-      </p:nvGrpSpPr>
-      <p:grpSpPr/>
-      <p:sp>
-        <p:nvSpPr>
-          <p:cNvPr id="2" name="Rectangle 1"/>
-          <p:cNvSpPr/>
-          <p:nvPr/>
-        </p:nvSpPr>
-        <p:spPr>
-          <a:xfrm>
-            <a:off x="0" y="0"/>
-            <a:ext cx="12191695" cy="6858000"/>
-          </a:xfrm>
-          <a:prstGeom prst="rect">
-            <a:avLst/>
-          </a:prstGeom>
-          <a:solidFill>
-            <a:srgbClr val="0E1B33"/>
-          </a:solidFill>
-          <a:ln>
-            <a:noFill/>
-          </a:ln>
-          <a:effectLst/>
-        </p:spPr>
-        <p:style>
-          <a:lnRef idx="1">
-            <a:schemeClr val="accent1"/>
-          </a:lnRef>
-          <a:fillRef idx="3">
-            <a:schemeClr val="accent1"/>
-          </a:fillRef>
-          <a:effectRef idx="2">
-            <a:schemeClr val="accent1"/>
-          </a:effectRef>
-          <a:fontRef idx="minor">
-            <a:schemeClr val="lt1"/>
-          </a:fontRef>
-        </p:style>
-        <p:txBody>
-          <a:bodyPr rtlCol="0" anchor="ctr"/>
-          <a:lstStyle/>
-          <a:p>
-            <a:pPr algn="ctr"/>
-          </a:p>
-        </p:txBody>
-      </p:sp>
-      <p:sp>
-        <p:nvSpPr>
-          <p:cNvPr id="3" name="Rectangle 2"/>
-          <p:cNvSpPr/>
-          <p:nvPr/>
-        </p:nvSpPr>
-        <p:spPr>
-          <a:xfrm>
-            <a:off x="0" y="5669280"/>
-            <a:ext cx="12191695" cy="1188720"/>
-          </a:xfrm>
-          <a:prstGeom prst="rect">
-            <a:avLst/>
-          </a:prstGeom>
-          <a:solidFill>
-            <a:srgbClr val="0055FF"/>
-          </a:solidFill>
-          <a:ln>
-            <a:noFill/>
-          </a:ln>
-          <a:effectLst/>
-        </p:spPr>
-        <p:style>
-          <a:lnRef idx="1">
-            <a:schemeClr val="accent1"/>
-          </a:lnRef>
-          <a:fillRef idx="3">
-            <a:schemeClr val="accent1"/>
-          </a:fillRef>
-          <a:effectRef idx="2">
-            <a:schemeClr val="accent1"/>
-          </a:effectRef>
-          <a:fontRef idx="minor">
-            <a:schemeClr val="lt1"/>
-          </a:fontRef>
-        </p:style>
-        <p:txBody>
-          <a:bodyPr rtlCol="0" anchor="ctr"/>
-          <a:lstStyle/>
-          <a:p>
-            <a:pPr algn="ctr"/>
-          </a:p>
-        </p:txBody>
-      </p:sp>
-      <p:sp>
-        <p:nvSpPr>
-          <p:cNvPr id="4" name="TextBox 3"/>
-          <p:cNvSpPr txBox="1"/>
-          <p:nvPr/>
-        </p:nvSpPr>
-        <p:spPr>
-          <a:xfrm>
-            <a:off x="822960" y="822960"/>
-            <a:ext cx="10515600" cy="457200"/>
-          </a:xfrm>
-          <a:prstGeom prst="rect">
-            <a:avLst/>
-          </a:prstGeom>
-          <a:noFill/>
-        </p:spPr>
-        <p:txBody>
-          <a:bodyPr wrap="square" anchor="t" lIns="0" rIns="0" tIns="0" bIns="0">
-            <a:spAutoFit/>
-          </a:bodyPr>
-          <a:lstStyle/>
-          <a:p>
-            <a:pPr algn="l">
-              <a:spcAft>
-                <a:spcPts val="600"/>
-              </a:spcAft>
-            </a:pPr>
-            <a:r>
-              <a:rPr sz="1400" b="1">
-                <a:solidFill>
-                  <a:srgbClr val="A9BCDD"/>
-                </a:solidFill>
-                <a:latin typeface="Calibri"/>
-              </a:rPr>
-              <a:t>CONCLUSÃO</a:t>
-            </a:r>
-          </a:p>
-        </p:txBody>
-      </p:sp>
-      <p:sp>
-        <p:nvSpPr>
-          <p:cNvPr id="5" name="TextBox 4"/>
-          <p:cNvSpPr txBox="1"/>
-          <p:nvPr/>
-        </p:nvSpPr>
-        <p:spPr>
-          <a:xfrm>
-            <a:off x="822960" y="1280160"/>
-            <a:ext cx="10515600" cy="2011680"/>
-          </a:xfrm>
-          <a:prstGeom prst="rect">
-            <a:avLst/>
-          </a:prstGeom>
-          <a:noFill/>
-        </p:spPr>
-        <p:txBody>
-          <a:bodyPr wrap="square" anchor="t" lIns="0" rIns="0" tIns="0" bIns="0">
-            <a:spAutoFit/>
-          </a:bodyPr>
-          <a:lstStyle/>
-          <a:p>
-            <a:pPr algn="l">
-              <a:spcAft>
-                <a:spcPts val="600"/>
-              </a:spcAft>
-            </a:pPr>
-            <a:r>
-              <a:rPr sz="4000" b="1">
-                <a:solidFill>
-                  <a:srgbClr val="FFFFFF"/>
-                </a:solidFill>
-                <a:latin typeface="Calibri"/>
-              </a:rPr>
-              <a:t>Investir em apartamentos 2Q,</a:t>
-            </a:r>
-          </a:p>
-          <a:p>
-            <a:pPr algn="l">
-              <a:spcAft>
-                <a:spcPts val="600"/>
-              </a:spcAft>
-            </a:pPr>
-            <a:r>
-              <a:rPr sz="4000" b="1">
-                <a:solidFill>
-                  <a:srgbClr val="FC6058"/>
-                </a:solidFill>
-                <a:latin typeface="Calibri"/>
-              </a:rPr>
-              <a:t>começando por Morretes.</a:t>
-            </a:r>
-          </a:p>
-        </p:txBody>
-      </p:sp>
-      <p:sp>
-        <p:nvSpPr>
-          <p:cNvPr id="6" name="TextBox 5"/>
-          <p:cNvSpPr txBox="1"/>
-          <p:nvPr/>
-        </p:nvSpPr>
-        <p:spPr>
-          <a:xfrm>
-            <a:off x="822960" y="3291840"/>
-            <a:ext cx="10515600" cy="2011680"/>
-          </a:xfrm>
-          <a:prstGeom prst="rect">
-            <a:avLst/>
-          </a:prstGeom>
-          <a:noFill/>
-        </p:spPr>
-        <p:txBody>
-          <a:bodyPr wrap="square" anchor="t" lIns="0" rIns="0" tIns="0" bIns="0">
-            <a:spAutoFit/>
-          </a:bodyPr>
-          <a:lstStyle/>
-          <a:p>
-            <a:pPr algn="l">
-              <a:spcAft>
-                <a:spcPts val="600"/>
-              </a:spcAft>
-            </a:pPr>
-            <a:r>
-              <a:rPr sz="2000" b="0">
-                <a:solidFill>
-                  <a:srgbClr val="D6DFF0"/>
-                </a:solidFill>
-                <a:latin typeface="Calibri"/>
-              </a:rPr>
-              <a:t>Retorno líquido de encargos de 10,8% a. a. (cenário base de ocupação 55%), com ticket acessível e alta confiabilidade.</a:t>
-            </a:r>
-          </a:p>
-          <a:p>
-            <a:pPr algn="l">
-              <a:spcAft>
-                <a:spcPts val="600"/>
-              </a:spcAft>
-            </a:pPr>
-            <a:r>
-              <a:rPr sz="1800" b="0">
-                <a:solidFill>
-                  <a:srgbClr val="A9BCDD"/>
-                </a:solidFill>
-                <a:latin typeface="Calibri"/>
-              </a:rPr>
-              <a:t>Tese dos compactos: validada na intuição (eficiência), ajustada na execução (2Q, Morretes).</a:t>
-            </a:r>
-          </a:p>
-        </p:txBody>
-      </p:sp>
-      <p:sp>
-        <p:nvSpPr>
-          <p:cNvPr id="7" name="TextBox 6"/>
-          <p:cNvSpPr txBox="1"/>
-          <p:nvPr/>
-        </p:nvSpPr>
-        <p:spPr>
-          <a:xfrm>
-            <a:off x="822960" y="5943600"/>
-            <a:ext cx="10515600" cy="640080"/>
-          </a:xfrm>
-          <a:prstGeom prst="rect">
-            <a:avLst/>
-          </a:prstGeom>
-          <a:noFill/>
-        </p:spPr>
-        <p:txBody>
-          <a:bodyPr wrap="square" anchor="t" lIns="0" rIns="0" tIns="0" bIns="0">
-            <a:spAutoFit/>
-          </a:bodyPr>
-          <a:lstStyle/>
-          <a:p>
-            <a:pPr algn="l">
-              <a:spcAft>
-                <a:spcPts val="600"/>
-              </a:spcAft>
-            </a:pPr>
-            <a:r>
-              <a:rPr sz="2200" b="1">
-                <a:solidFill>
-                  <a:srgbClr val="FFFFFF"/>
-                </a:solidFill>
-                <a:latin typeface="Calibri"/>
-              </a:rPr>
-              <a:t>Obrigado!</a:t>
-            </a:r>
-          </a:p>
-          <a:p>
-            <a:pPr algn="l">
-              <a:spcAft>
-                <a:spcPts val="600"/>
-              </a:spcAft>
-            </a:pPr>
-            <a:r>
-              <a:rPr sz="1400" b="0">
-                <a:solidFill>
-                  <a:srgbClr val="FFFFFF"/>
-                </a:solidFill>
-                <a:latin typeface="Calibri"/>
-              </a:rPr>
-              <a:t>   Relatório: relatorio.md · Código: scripts/ · Processo: ai-log/</a:t>
-            </a:r>
-          </a:p>
-        </p:txBody>
-      </p:sp>
-      <p:sp>
-        <p:nvSpPr>
-          <p:cNvPr id="8" name="TextBox 7"/>
-          <p:cNvSpPr txBox="1"/>
-          <p:nvPr/>
-        </p:nvSpPr>
-        <p:spPr>
-          <a:xfrm>
-            <a:off x="411480" y="6446520"/>
-            <a:ext cx="4572000" cy="320040"/>
-          </a:xfrm>
-          <a:prstGeom prst="rect">
-            <a:avLst/>
-          </a:prstGeom>
-          <a:noFill/>
-        </p:spPr>
-        <p:txBody>
-          <a:bodyPr wrap="square" anchor="t" lIns="0" rIns="0" tIns="0" bIns="0">
-            <a:spAutoFit/>
-          </a:bodyPr>
-          <a:lstStyle/>
-          <a:p>
-            <a:pPr algn="l">
-              <a:spcAft>
-                <a:spcPts val="600"/>
-              </a:spcAft>
-            </a:pPr>
-            <a:r>
-              <a:rPr sz="1000" b="0">
-                <a:solidFill>
-                  <a:srgbClr val="4A5A78"/>
-                </a:solidFill>
-                <a:latin typeface="Calibri"/>
-              </a:rPr>
-              <a:t>Seazone · Hackathon Jovens Talentos AI Builder 2026</a:t>
-            </a:r>
-          </a:p>
-        </p:txBody>
-      </p:sp>
-      <p:sp>
-        <p:nvSpPr>
-          <p:cNvPr id="9" name="TextBox 8"/>
-          <p:cNvSpPr txBox="1"/>
-          <p:nvPr/>
-        </p:nvSpPr>
-        <p:spPr>
-          <a:xfrm>
-            <a:off x="11247120" y="6446520"/>
-            <a:ext cx="640080" cy="320040"/>
-          </a:xfrm>
-          <a:prstGeom prst="rect">
-            <a:avLst/>
-          </a:prstGeom>
-          <a:noFill/>
-        </p:spPr>
-        <p:txBody>
-          <a:bodyPr wrap="square" anchor="t" lIns="0" rIns="0" tIns="0" bIns="0">
-            <a:spAutoFit/>
-          </a:bodyPr>
-          <a:lstStyle/>
-          <a:p>
-            <a:pPr algn="r">
-              <a:spcAft>
-                <a:spcPts val="600"/>
-              </a:spcAft>
-            </a:pPr>
-            <a:r>
-              <a:rPr sz="1200" b="0">
-                <a:solidFill>
-                  <a:srgbClr val="4A5A78"/>
-                </a:solidFill>
-                <a:latin typeface="Calibri"/>
-              </a:rPr>
-              <a:t>11</a:t>
+              <a:t>Análise completa: relatorio.md  ·  Processo com IA: ai-log/  ·  github.com/escalant-e/jt2026-ricardo-escalante</a:t>
             </a:r>
           </a:p>
         </p:txBody>
@@ -4325,7 +3510,7 @@
                 </a:solidFill>
                 <a:latin typeface="Calibri"/>
               </a:rPr>
-              <a:t>CONTEXTO</a:t>
+              <a:t>RACIOCÍNIO 1 DE 2</a:t>
             </a:r>
           </a:p>
         </p:txBody>
@@ -4364,1181 +3549,22 @@
                 </a:solidFill>
                 <a:latin typeface="Calibri"/>
               </a:rPr>
-              <a:t>O desafio</a:t>
-            </a:r>
-          </a:p>
-        </p:txBody>
-      </p:sp>
-      <p:sp>
-        <p:nvSpPr>
-          <p:cNvPr id="6" name="TextBox 5"/>
-          <p:cNvSpPr txBox="1"/>
-          <p:nvPr/>
-        </p:nvSpPr>
-        <p:spPr>
-          <a:xfrm>
-            <a:off x="685800" y="1508760"/>
-            <a:ext cx="10789920" cy="2011680"/>
-          </a:xfrm>
-          <a:prstGeom prst="rect">
-            <a:avLst/>
-          </a:prstGeom>
-          <a:noFill/>
-        </p:spPr>
-        <p:txBody>
-          <a:bodyPr wrap="square">
-            <a:spAutoFit/>
-          </a:bodyPr>
-          <a:lstStyle/>
-          <a:p>
-            <a:pPr>
-              <a:spcAft>
-                <a:spcPts val="1200"/>
-              </a:spcAft>
-            </a:pPr>
-            <a:r>
-              <a:rPr sz="1900" b="1">
-                <a:solidFill>
-                  <a:srgbClr val="0E1B33"/>
-                </a:solidFill>
-              </a:rPr>
-              <a:t>• Base de dados real de Itapema (SC): </a:t>
-            </a:r>
-            <a:r>
-              <a:rPr sz="1900">
-                <a:solidFill>
-                  <a:srgbClr val="4A5A78"/>
-                </a:solidFill>
-              </a:rPr>
-              <a:t>4.441 anúncios de Airbnb + 8.329 de venda (VivaReal).</a:t>
-            </a:r>
-          </a:p>
-          <a:p>
-            <a:pPr>
-              <a:spcAft>
-                <a:spcPts val="1200"/>
-              </a:spcAft>
-            </a:pPr>
-            <a:r>
-              <a:rPr sz="1900" b="1">
-                <a:solidFill>
-                  <a:srgbClr val="0E1B33"/>
-                </a:solidFill>
-              </a:rPr>
-              <a:t>• Missão: </a:t>
-            </a:r>
-            <a:r>
-              <a:rPr sz="1900">
-                <a:solidFill>
-                  <a:srgbClr val="4A5A78"/>
-                </a:solidFill>
-              </a:rPr>
-              <a:t>responder 4 perguntas e entregar uma recomendação de investimento para a Seazone, líder em short stay no Brasil.</a:t>
-            </a:r>
-          </a:p>
-          <a:p>
-            <a:pPr>
-              <a:spcAft>
-                <a:spcPts val="1200"/>
-              </a:spcAft>
-            </a:pPr>
-            <a:r>
-              <a:rPr sz="1900" b="1">
-                <a:solidFill>
-                  <a:srgbClr val="0E1B33"/>
-                </a:solidFill>
-              </a:rPr>
-              <a:t>• Critérios 'abertos' de propósito: </a:t>
-            </a:r>
-            <a:r>
-              <a:rPr sz="1900">
-                <a:solidFill>
-                  <a:srgbClr val="4A5A78"/>
-                </a:solidFill>
-              </a:rPr>
-              <a:t>definimos o critério (retorno ajustado por ocupação) e justificamos com os dados.</a:t>
-            </a:r>
-          </a:p>
-        </p:txBody>
-      </p:sp>
-      <p:sp>
-        <p:nvSpPr>
-          <p:cNvPr id="7" name="Rectangle 6"/>
-          <p:cNvSpPr/>
-          <p:nvPr/>
-        </p:nvSpPr>
-        <p:spPr>
-          <a:xfrm>
-            <a:off x="685800" y="3840480"/>
-            <a:ext cx="10789920" cy="2286000"/>
-          </a:xfrm>
-          <a:prstGeom prst="rect">
-            <a:avLst/>
-          </a:prstGeom>
-          <a:solidFill>
-            <a:srgbClr val="F4F7FC"/>
-          </a:solidFill>
-          <a:ln>
-            <a:noFill/>
-          </a:ln>
-          <a:effectLst/>
-        </p:spPr>
-        <p:style>
-          <a:lnRef idx="1">
-            <a:schemeClr val="accent1"/>
-          </a:lnRef>
-          <a:fillRef idx="3">
-            <a:schemeClr val="accent1"/>
-          </a:fillRef>
-          <a:effectRef idx="2">
-            <a:schemeClr val="accent1"/>
-          </a:effectRef>
-          <a:fontRef idx="minor">
-            <a:schemeClr val="lt1"/>
-          </a:fontRef>
-        </p:style>
-        <p:txBody>
-          <a:bodyPr rtlCol="0" anchor="ctr"/>
-          <a:lstStyle/>
-          <a:p>
-            <a:pPr algn="ctr"/>
-          </a:p>
-        </p:txBody>
-      </p:sp>
-      <p:sp>
-        <p:nvSpPr>
-          <p:cNvPr id="8" name="TextBox 7"/>
-          <p:cNvSpPr txBox="1"/>
-          <p:nvPr/>
-        </p:nvSpPr>
-        <p:spPr>
-          <a:xfrm>
-            <a:off x="960120" y="4023360"/>
-            <a:ext cx="10241280" cy="457200"/>
-          </a:xfrm>
-          <a:prstGeom prst="rect">
-            <a:avLst/>
-          </a:prstGeom>
-          <a:noFill/>
-        </p:spPr>
-        <p:txBody>
-          <a:bodyPr wrap="square" anchor="t" lIns="0" rIns="0" tIns="0" bIns="0">
-            <a:spAutoFit/>
-          </a:bodyPr>
-          <a:lstStyle/>
-          <a:p>
-            <a:pPr algn="l">
-              <a:spcAft>
-                <a:spcPts val="600"/>
-              </a:spcAft>
-            </a:pPr>
-            <a:r>
-              <a:rPr sz="1300" b="1">
-                <a:solidFill>
-                  <a:srgbClr val="0055FF"/>
-                </a:solidFill>
-                <a:latin typeface="Calibri"/>
-              </a:rPr>
-              <a:t>TESE INTERNA A AVALIAR</a:t>
-            </a:r>
-          </a:p>
-        </p:txBody>
-      </p:sp>
-      <p:sp>
-        <p:nvSpPr>
-          <p:cNvPr id="9" name="TextBox 8"/>
-          <p:cNvSpPr txBox="1"/>
-          <p:nvPr/>
-        </p:nvSpPr>
-        <p:spPr>
-          <a:xfrm>
-            <a:off x="960120" y="4389120"/>
-            <a:ext cx="10241280" cy="1554480"/>
-          </a:xfrm>
-          <a:prstGeom prst="rect">
-            <a:avLst/>
-          </a:prstGeom>
-          <a:noFill/>
-        </p:spPr>
-        <p:txBody>
-          <a:bodyPr wrap="square" anchor="t" lIns="0" rIns="0" tIns="0" bIns="0">
-            <a:spAutoFit/>
-          </a:bodyPr>
-          <a:lstStyle/>
-          <a:p>
-            <a:pPr algn="l">
-              <a:spcAft>
-                <a:spcPts val="600"/>
-              </a:spcAft>
-            </a:pPr>
-            <a:r>
-              <a:rPr sz="1900" b="1">
-                <a:solidFill>
-                  <a:srgbClr val="0E1B33"/>
-                </a:solidFill>
-                <a:latin typeface="Calibri"/>
-              </a:rPr>
-              <a:t>"Apartamentos compactos (studio/1Q) na região do Centro seriam a aposta mais eficiente para a Seazone."</a:t>
-            </a:r>
-          </a:p>
-          <a:p>
-            <a:pPr algn="l">
-              <a:spcAft>
-                <a:spcPts val="600"/>
-              </a:spcAft>
-            </a:pPr>
-            <a:r>
-              <a:rPr sz="1700" b="0">
-                <a:solidFill>
-                  <a:srgbClr val="4A5A78"/>
-                </a:solidFill>
-                <a:latin typeface="Calibri"/>
-              </a:rPr>
-              <a:t>→ Tomamos posição: os dados a sustentam ou não?</a:t>
-            </a:r>
-          </a:p>
-        </p:txBody>
-      </p:sp>
-      <p:sp>
-        <p:nvSpPr>
-          <p:cNvPr id="10" name="TextBox 9"/>
-          <p:cNvSpPr txBox="1"/>
-          <p:nvPr/>
-        </p:nvSpPr>
-        <p:spPr>
-          <a:xfrm>
-            <a:off x="411480" y="6446520"/>
-            <a:ext cx="4572000" cy="320040"/>
-          </a:xfrm>
-          <a:prstGeom prst="rect">
-            <a:avLst/>
-          </a:prstGeom>
-          <a:noFill/>
-        </p:spPr>
-        <p:txBody>
-          <a:bodyPr wrap="square" anchor="t" lIns="0" rIns="0" tIns="0" bIns="0">
-            <a:spAutoFit/>
-          </a:bodyPr>
-          <a:lstStyle/>
-          <a:p>
-            <a:pPr algn="l">
-              <a:spcAft>
-                <a:spcPts val="600"/>
-              </a:spcAft>
-            </a:pPr>
-            <a:r>
-              <a:rPr sz="1000" b="0">
-                <a:solidFill>
-                  <a:srgbClr val="4A5A78"/>
-                </a:solidFill>
-                <a:latin typeface="Calibri"/>
-              </a:rPr>
-              <a:t>Seazone · Hackathon Jovens Talentos AI Builder 2026</a:t>
-            </a:r>
-          </a:p>
-        </p:txBody>
-      </p:sp>
-      <p:sp>
-        <p:nvSpPr>
-          <p:cNvPr id="11" name="TextBox 10"/>
-          <p:cNvSpPr txBox="1"/>
-          <p:nvPr/>
-        </p:nvSpPr>
-        <p:spPr>
-          <a:xfrm>
-            <a:off x="11247120" y="6446520"/>
-            <a:ext cx="640080" cy="320040"/>
-          </a:xfrm>
-          <a:prstGeom prst="rect">
-            <a:avLst/>
-          </a:prstGeom>
-          <a:noFill/>
-        </p:spPr>
-        <p:txBody>
-          <a:bodyPr wrap="square" anchor="t" lIns="0" rIns="0" tIns="0" bIns="0">
-            <a:spAutoFit/>
-          </a:bodyPr>
-          <a:lstStyle/>
-          <a:p>
-            <a:pPr algn="r">
-              <a:spcAft>
-                <a:spcPts val="600"/>
-              </a:spcAft>
-            </a:pPr>
-            <a:r>
-              <a:rPr sz="1200" b="0">
-                <a:solidFill>
-                  <a:srgbClr val="4A5A78"/>
-                </a:solidFill>
-                <a:latin typeface="Calibri"/>
-              </a:rPr>
-              <a:t>2</a:t>
-            </a:r>
-          </a:p>
-        </p:txBody>
-      </p:sp>
-    </p:spTree>
-  </p:cSld>
-  <p:clrMapOvr>
-    <a:masterClrMapping/>
-  </p:clrMapOvr>
-</p:sld>
-</file>
-
-<file path=ppt/slides/slide3.xml><?xml version="1.0" encoding="utf-8"?>
-<p:sld xmlns:a="http://schemas.openxmlformats.org/drawingml/2006/main" xmlns:p="http://schemas.openxmlformats.org/presentationml/2006/main" xmlns:r="http://schemas.openxmlformats.org/officeDocument/2006/relationships">
-  <p:cSld>
-    <p:spTree>
-      <p:nvGrpSpPr>
-        <p:cNvPr id="1" name=""/>
-        <p:cNvGrpSpPr/>
-        <p:nvPr/>
-      </p:nvGrpSpPr>
-      <p:grpSpPr/>
-      <p:sp>
-        <p:nvSpPr>
-          <p:cNvPr id="2" name="Rectangle 1"/>
-          <p:cNvSpPr/>
-          <p:nvPr/>
-        </p:nvSpPr>
-        <p:spPr>
-          <a:xfrm>
-            <a:off x="0" y="0"/>
-            <a:ext cx="12191695" cy="1143000"/>
-          </a:xfrm>
-          <a:prstGeom prst="rect">
-            <a:avLst/>
-          </a:prstGeom>
-          <a:solidFill>
-            <a:srgbClr val="0E1B33"/>
-          </a:solidFill>
-          <a:ln>
-            <a:noFill/>
-          </a:ln>
-          <a:effectLst/>
-        </p:spPr>
-        <p:style>
-          <a:lnRef idx="1">
-            <a:schemeClr val="accent1"/>
-          </a:lnRef>
-          <a:fillRef idx="3">
-            <a:schemeClr val="accent1"/>
-          </a:fillRef>
-          <a:effectRef idx="2">
-            <a:schemeClr val="accent1"/>
-          </a:effectRef>
-          <a:fontRef idx="minor">
-            <a:schemeClr val="lt1"/>
-          </a:fontRef>
-        </p:style>
-        <p:txBody>
-          <a:bodyPr rtlCol="0" anchor="ctr"/>
-          <a:lstStyle/>
-          <a:p>
-            <a:pPr algn="ctr"/>
-          </a:p>
-        </p:txBody>
-      </p:sp>
-      <p:sp>
-        <p:nvSpPr>
-          <p:cNvPr id="3" name="Rectangle 2"/>
-          <p:cNvSpPr/>
-          <p:nvPr/>
-        </p:nvSpPr>
-        <p:spPr>
-          <a:xfrm>
-            <a:off x="411480" y="301752"/>
-            <a:ext cx="82296" cy="548640"/>
-          </a:xfrm>
-          <a:prstGeom prst="rect">
-            <a:avLst/>
-          </a:prstGeom>
-          <a:solidFill>
-            <a:srgbClr val="FC6058"/>
-          </a:solidFill>
-          <a:ln>
-            <a:noFill/>
-          </a:ln>
-          <a:effectLst/>
-        </p:spPr>
-        <p:style>
-          <a:lnRef idx="1">
-            <a:schemeClr val="accent1"/>
-          </a:lnRef>
-          <a:fillRef idx="3">
-            <a:schemeClr val="accent1"/>
-          </a:fillRef>
-          <a:effectRef idx="2">
-            <a:schemeClr val="accent1"/>
-          </a:effectRef>
-          <a:fontRef idx="minor">
-            <a:schemeClr val="lt1"/>
-          </a:fontRef>
-        </p:style>
-        <p:txBody>
-          <a:bodyPr rtlCol="0" anchor="ctr"/>
-          <a:lstStyle/>
-          <a:p>
-            <a:pPr algn="ctr"/>
-          </a:p>
-        </p:txBody>
-      </p:sp>
-      <p:sp>
-        <p:nvSpPr>
-          <p:cNvPr id="4" name="TextBox 3"/>
-          <p:cNvSpPr txBox="1"/>
-          <p:nvPr/>
-        </p:nvSpPr>
-        <p:spPr>
-          <a:xfrm>
-            <a:off x="685800" y="201168"/>
-            <a:ext cx="10058400" cy="365760"/>
-          </a:xfrm>
-          <a:prstGeom prst="rect">
-            <a:avLst/>
-          </a:prstGeom>
-          <a:noFill/>
-        </p:spPr>
-        <p:txBody>
-          <a:bodyPr wrap="square" anchor="t" lIns="0" rIns="0" tIns="0" bIns="0">
-            <a:spAutoFit/>
-          </a:bodyPr>
-          <a:lstStyle/>
-          <a:p>
-            <a:pPr algn="l">
-              <a:spcAft>
-                <a:spcPts val="600"/>
-              </a:spcAft>
-            </a:pPr>
-            <a:r>
-              <a:rPr sz="1300" b="1">
-                <a:solidFill>
-                  <a:srgbClr val="A9BCDD"/>
-                </a:solidFill>
-                <a:latin typeface="Calibri"/>
-              </a:rPr>
-              <a:t>MÉTODO</a:t>
-            </a:r>
-          </a:p>
-        </p:txBody>
-      </p:sp>
-      <p:sp>
-        <p:nvSpPr>
-          <p:cNvPr id="5" name="TextBox 4"/>
-          <p:cNvSpPr txBox="1"/>
-          <p:nvPr/>
-        </p:nvSpPr>
-        <p:spPr>
-          <a:xfrm>
-            <a:off x="685800" y="502920"/>
-            <a:ext cx="10515600" cy="640080"/>
-          </a:xfrm>
-          <a:prstGeom prst="rect">
-            <a:avLst/>
-          </a:prstGeom>
-          <a:noFill/>
-        </p:spPr>
-        <p:txBody>
-          <a:bodyPr wrap="square" anchor="t" lIns="0" rIns="0" tIns="0" bIns="0">
-            <a:spAutoFit/>
-          </a:bodyPr>
-          <a:lstStyle/>
-          <a:p>
-            <a:pPr algn="l">
-              <a:spcAft>
-                <a:spcPts val="600"/>
-              </a:spcAft>
-            </a:pPr>
-            <a:r>
-              <a:rPr sz="3000" b="1">
-                <a:solidFill>
-                  <a:srgbClr val="FFFFFF"/>
-                </a:solidFill>
-                <a:latin typeface="Calibri"/>
-              </a:rPr>
-              <a:t>Como analisamos</a:t>
-            </a:r>
-          </a:p>
-        </p:txBody>
-      </p:sp>
-      <p:sp>
-        <p:nvSpPr>
-          <p:cNvPr id="6" name="TextBox 5"/>
-          <p:cNvSpPr txBox="1"/>
-          <p:nvPr/>
-        </p:nvSpPr>
-        <p:spPr>
-          <a:xfrm>
-            <a:off x="685800" y="1463040"/>
-            <a:ext cx="5669280" cy="4572000"/>
-          </a:xfrm>
-          <a:prstGeom prst="rect">
-            <a:avLst/>
-          </a:prstGeom>
-          <a:noFill/>
-        </p:spPr>
-        <p:txBody>
-          <a:bodyPr wrap="square">
-            <a:spAutoFit/>
-          </a:bodyPr>
-          <a:lstStyle/>
-          <a:p>
-            <a:pPr>
-              <a:spcAft>
-                <a:spcPts val="1200"/>
-              </a:spcAft>
-            </a:pPr>
-            <a:r>
-              <a:rPr sz="1800" b="1">
-                <a:solidFill>
-                  <a:srgbClr val="0E1B33"/>
-                </a:solidFill>
-              </a:rPr>
-              <a:t>• Receita: </a:t>
-            </a:r>
-            <a:r>
-              <a:rPr sz="1800">
-                <a:solidFill>
-                  <a:srgbClr val="4A5A78"/>
-                </a:solidFill>
-              </a:rPr>
-              <a:t>diária mediana × 365 × ocupação (cenários 40/55/70%).</a:t>
-            </a:r>
-          </a:p>
-          <a:p>
-            <a:pPr>
-              <a:spcAft>
-                <a:spcPts val="1200"/>
-              </a:spcAft>
-            </a:pPr>
-            <a:r>
-              <a:rPr sz="1800" b="1">
-                <a:solidFill>
-                  <a:srgbClr val="0E1B33"/>
-                </a:solidFill>
-              </a:rPr>
-              <a:t>• Price_AV = disponibilidade </a:t>
-            </a:r>
-            <a:r>
-              <a:rPr sz="1800">
-                <a:solidFill>
-                  <a:srgbClr val="4A5A78"/>
-                </a:solidFill>
-              </a:rPr>
-              <a:t>→ modelamos por cenários, não 'dias ocupados'.</a:t>
-            </a:r>
-          </a:p>
-          <a:p>
-            <a:pPr>
-              <a:spcAft>
-                <a:spcPts val="1200"/>
-              </a:spcAft>
-            </a:pPr>
-            <a:r>
-              <a:rPr sz="1800" b="1">
-                <a:solidFill>
-                  <a:srgbClr val="0E1B33"/>
-                </a:solidFill>
-              </a:rPr>
-              <a:t>• Retorno: </a:t>
-            </a:r>
-            <a:r>
-              <a:rPr sz="1800">
-                <a:solidFill>
-                  <a:srgbClr val="4A5A78"/>
-                </a:solidFill>
-              </a:rPr>
-              <a:t>receita ÷ preço de venda (VivaReal).</a:t>
-            </a:r>
-          </a:p>
-          <a:p>
-            <a:pPr>
-              <a:spcAft>
-                <a:spcPts val="1200"/>
-              </a:spcAft>
-            </a:pPr>
-            <a:r>
-              <a:rPr sz="1800" b="1">
-                <a:solidFill>
-                  <a:srgbClr val="0E1B33"/>
-                </a:solidFill>
-              </a:rPr>
-              <a:t>• Confiabilidade: </a:t>
-            </a:r>
-            <a:r>
-              <a:rPr sz="1800">
-                <a:solidFill>
-                  <a:srgbClr val="4A5A78"/>
-                </a:solidFill>
-              </a:rPr>
-              <a:t>pares ALTA/MÉDIA/BAIXA por volume de listings e anúncios.</a:t>
-            </a:r>
-          </a:p>
-          <a:p>
-            <a:pPr>
-              <a:spcAft>
-                <a:spcPts val="1200"/>
-              </a:spcAft>
-            </a:pPr>
-            <a:r>
-              <a:rPr sz="1800" b="1">
-                <a:solidFill>
-                  <a:srgbClr val="0E1B33"/>
-                </a:solidFill>
-              </a:rPr>
-              <a:t>• Rigor: </a:t>
-            </a:r>
-            <a:r>
-              <a:rPr sz="1800">
-                <a:solidFill>
-                  <a:srgbClr val="4A5A78"/>
-                </a:solidFill>
-              </a:rPr>
-              <a:t>CRISP-DM + teste de falseamento da tese.</a:t>
-            </a:r>
-          </a:p>
-        </p:txBody>
-      </p:sp>
-      <p:sp>
-        <p:nvSpPr>
-          <p:cNvPr id="7" name="Rectangle 6"/>
-          <p:cNvSpPr/>
-          <p:nvPr/>
-        </p:nvSpPr>
-        <p:spPr>
-          <a:xfrm>
-            <a:off x="6675120" y="1463040"/>
-            <a:ext cx="4846320" cy="4663440"/>
-          </a:xfrm>
-          <a:prstGeom prst="rect">
-            <a:avLst/>
-          </a:prstGeom>
-          <a:solidFill>
-            <a:srgbClr val="0E1B33"/>
-          </a:solidFill>
-          <a:ln>
-            <a:noFill/>
-          </a:ln>
-          <a:effectLst/>
-        </p:spPr>
-        <p:style>
-          <a:lnRef idx="1">
-            <a:schemeClr val="accent1"/>
-          </a:lnRef>
-          <a:fillRef idx="3">
-            <a:schemeClr val="accent1"/>
-          </a:fillRef>
-          <a:effectRef idx="2">
-            <a:schemeClr val="accent1"/>
-          </a:effectRef>
-          <a:fontRef idx="minor">
-            <a:schemeClr val="lt1"/>
-          </a:fontRef>
-        </p:style>
-        <p:txBody>
-          <a:bodyPr rtlCol="0" anchor="ctr"/>
-          <a:lstStyle/>
-          <a:p>
-            <a:pPr algn="ctr"/>
-          </a:p>
-        </p:txBody>
-      </p:sp>
-      <p:sp>
-        <p:nvSpPr>
-          <p:cNvPr id="8" name="TextBox 7"/>
-          <p:cNvSpPr txBox="1"/>
-          <p:nvPr/>
-        </p:nvSpPr>
-        <p:spPr>
-          <a:xfrm>
-            <a:off x="6949440" y="1691640"/>
-            <a:ext cx="4297680" cy="457200"/>
-          </a:xfrm>
-          <a:prstGeom prst="rect">
-            <a:avLst/>
-          </a:prstGeom>
-          <a:noFill/>
-        </p:spPr>
-        <p:txBody>
-          <a:bodyPr wrap="square" anchor="t" lIns="0" rIns="0" tIns="0" bIns="0">
-            <a:spAutoFit/>
-          </a:bodyPr>
-          <a:lstStyle/>
-          <a:p>
-            <a:pPr algn="l">
-              <a:spcAft>
-                <a:spcPts val="600"/>
-              </a:spcAft>
-            </a:pPr>
-            <a:r>
-              <a:rPr sz="1300" b="1">
-                <a:solidFill>
-                  <a:srgbClr val="A9BCDD"/>
-                </a:solidFill>
-                <a:latin typeface="Calibri"/>
-              </a:rPr>
-              <a:t>BASES UTILIZADAS</a:t>
-            </a:r>
-          </a:p>
-        </p:txBody>
-      </p:sp>
-      <p:sp>
-        <p:nvSpPr>
-          <p:cNvPr id="9" name="TextBox 8"/>
-          <p:cNvSpPr txBox="1"/>
-          <p:nvPr/>
-        </p:nvSpPr>
-        <p:spPr>
-          <a:xfrm>
-            <a:off x="6949440" y="2148840"/>
-            <a:ext cx="4297680" cy="3840480"/>
-          </a:xfrm>
-          <a:prstGeom prst="rect">
-            <a:avLst/>
-          </a:prstGeom>
-          <a:noFill/>
-        </p:spPr>
-        <p:txBody>
-          <a:bodyPr wrap="square">
-            <a:spAutoFit/>
-          </a:bodyPr>
-          <a:lstStyle/>
-          <a:p>
-            <a:pPr>
-              <a:spcAft>
-                <a:spcPts val="1000"/>
-              </a:spcAft>
-            </a:pPr>
-            <a:r>
-              <a:rPr sz="1600" b="1">
-                <a:solidFill>
-                  <a:srgbClr val="FFFFFF"/>
-                </a:solidFill>
-              </a:rPr>
-              <a:t>Details — </a:t>
-            </a:r>
-            <a:r>
-              <a:rPr sz="1500">
-                <a:solidFill>
-                  <a:srgbClr val="D6DFF0"/>
-                </a:solidFill>
-              </a:rPr>
-              <a:t>perfil, quartos, ratings</a:t>
-            </a:r>
-          </a:p>
-          <a:p>
-            <a:pPr>
-              <a:spcAft>
-                <a:spcPts val="1000"/>
-              </a:spcAft>
-            </a:pPr>
-            <a:r>
-              <a:rPr sz="1600" b="1">
-                <a:solidFill>
-                  <a:srgbClr val="FFFFFF"/>
-                </a:solidFill>
-              </a:rPr>
-              <a:t>Hosts — </a:t>
-            </a:r>
-            <a:r>
-              <a:rPr sz="1500">
-                <a:solidFill>
-                  <a:srgbClr val="D6DFF0"/>
-                </a:solidFill>
-              </a:rPr>
-              <a:t>anfitriões</a:t>
-            </a:r>
-          </a:p>
-          <a:p>
-            <a:pPr>
-              <a:spcAft>
-                <a:spcPts val="1000"/>
-              </a:spcAft>
-            </a:pPr>
-            <a:r>
-              <a:rPr sz="1600" b="1">
-                <a:solidFill>
-                  <a:srgbClr val="FFFFFF"/>
-                </a:solidFill>
-              </a:rPr>
-              <a:t>Mesh — </a:t>
-            </a:r>
-            <a:r>
-              <a:rPr sz="1500">
-                <a:solidFill>
-                  <a:srgbClr val="D6DFF0"/>
-                </a:solidFill>
-              </a:rPr>
-              <a:t>bairro / geolocalização</a:t>
-            </a:r>
-          </a:p>
-          <a:p>
-            <a:pPr>
-              <a:spcAft>
-                <a:spcPts val="1000"/>
-              </a:spcAft>
-            </a:pPr>
-            <a:r>
-              <a:rPr sz="1600" b="1">
-                <a:solidFill>
-                  <a:srgbClr val="FFFFFF"/>
-                </a:solidFill>
-              </a:rPr>
-              <a:t>Price_AV — </a:t>
-            </a:r>
-            <a:r>
-              <a:rPr sz="1500">
-                <a:solidFill>
-                  <a:srgbClr val="D6DFF0"/>
-                </a:solidFill>
-              </a:rPr>
-              <a:t>diária por data (jan–abr/25)</a:t>
-            </a:r>
-          </a:p>
-          <a:p>
-            <a:pPr>
-              <a:spcAft>
-                <a:spcPts val="1000"/>
-              </a:spcAft>
-            </a:pPr>
-            <a:r>
-              <a:rPr sz="1600" b="1">
-                <a:solidFill>
-                  <a:srgbClr val="FFFFFF"/>
-                </a:solidFill>
-              </a:rPr>
-              <a:t>VivaReal — </a:t>
-            </a:r>
-            <a:r>
-              <a:rPr sz="1500">
-                <a:solidFill>
-                  <a:srgbClr val="D6DFF0"/>
-                </a:solidFill>
-              </a:rPr>
-              <a:t>preço de venda, área, condomínio</a:t>
-            </a:r>
-          </a:p>
-        </p:txBody>
-      </p:sp>
-      <p:sp>
-        <p:nvSpPr>
-          <p:cNvPr id="10" name="TextBox 9"/>
-          <p:cNvSpPr txBox="1"/>
-          <p:nvPr/>
-        </p:nvSpPr>
-        <p:spPr>
-          <a:xfrm>
-            <a:off x="411480" y="6446520"/>
-            <a:ext cx="4572000" cy="320040"/>
-          </a:xfrm>
-          <a:prstGeom prst="rect">
-            <a:avLst/>
-          </a:prstGeom>
-          <a:noFill/>
-        </p:spPr>
-        <p:txBody>
-          <a:bodyPr wrap="square" anchor="t" lIns="0" rIns="0" tIns="0" bIns="0">
-            <a:spAutoFit/>
-          </a:bodyPr>
-          <a:lstStyle/>
-          <a:p>
-            <a:pPr algn="l">
-              <a:spcAft>
-                <a:spcPts val="600"/>
-              </a:spcAft>
-            </a:pPr>
-            <a:r>
-              <a:rPr sz="1000" b="0">
-                <a:solidFill>
-                  <a:srgbClr val="4A5A78"/>
-                </a:solidFill>
-                <a:latin typeface="Calibri"/>
-              </a:rPr>
-              <a:t>Seazone · Hackathon Jovens Talentos AI Builder 2026</a:t>
-            </a:r>
-          </a:p>
-        </p:txBody>
-      </p:sp>
-      <p:sp>
-        <p:nvSpPr>
-          <p:cNvPr id="11" name="TextBox 10"/>
-          <p:cNvSpPr txBox="1"/>
-          <p:nvPr/>
-        </p:nvSpPr>
-        <p:spPr>
-          <a:xfrm>
-            <a:off x="11247120" y="6446520"/>
-            <a:ext cx="640080" cy="320040"/>
-          </a:xfrm>
-          <a:prstGeom prst="rect">
-            <a:avLst/>
-          </a:prstGeom>
-          <a:noFill/>
-        </p:spPr>
-        <p:txBody>
-          <a:bodyPr wrap="square" anchor="t" lIns="0" rIns="0" tIns="0" bIns="0">
-            <a:spAutoFit/>
-          </a:bodyPr>
-          <a:lstStyle/>
-          <a:p>
-            <a:pPr algn="r">
-              <a:spcAft>
-                <a:spcPts val="600"/>
-              </a:spcAft>
-            </a:pPr>
-            <a:r>
-              <a:rPr sz="1200" b="0">
-                <a:solidFill>
-                  <a:srgbClr val="4A5A78"/>
-                </a:solidFill>
-                <a:latin typeface="Calibri"/>
-              </a:rPr>
-              <a:t>3</a:t>
-            </a:r>
-          </a:p>
-        </p:txBody>
-      </p:sp>
-    </p:spTree>
-  </p:cSld>
-  <p:clrMapOvr>
-    <a:masterClrMapping/>
-  </p:clrMapOvr>
-</p:sld>
-</file>
-
-<file path=ppt/slides/slide4.xml><?xml version="1.0" encoding="utf-8"?>
-<p:sld xmlns:a="http://schemas.openxmlformats.org/drawingml/2006/main" xmlns:p="http://schemas.openxmlformats.org/presentationml/2006/main" xmlns:r="http://schemas.openxmlformats.org/officeDocument/2006/relationships">
-  <p:cSld>
-    <p:spTree>
-      <p:nvGrpSpPr>
-        <p:cNvPr id="1" name=""/>
-        <p:cNvGrpSpPr/>
-        <p:nvPr/>
-      </p:nvGrpSpPr>
-      <p:grpSpPr/>
-      <p:sp>
-        <p:nvSpPr>
-          <p:cNvPr id="2" name="Rectangle 1"/>
-          <p:cNvSpPr/>
-          <p:nvPr/>
-        </p:nvSpPr>
-        <p:spPr>
-          <a:xfrm>
-            <a:off x="0" y="0"/>
-            <a:ext cx="12191695" cy="1143000"/>
-          </a:xfrm>
-          <a:prstGeom prst="rect">
-            <a:avLst/>
-          </a:prstGeom>
-          <a:solidFill>
-            <a:srgbClr val="0E1B33"/>
-          </a:solidFill>
-          <a:ln>
-            <a:noFill/>
-          </a:ln>
-          <a:effectLst/>
-        </p:spPr>
-        <p:style>
-          <a:lnRef idx="1">
-            <a:schemeClr val="accent1"/>
-          </a:lnRef>
-          <a:fillRef idx="3">
-            <a:schemeClr val="accent1"/>
-          </a:fillRef>
-          <a:effectRef idx="2">
-            <a:schemeClr val="accent1"/>
-          </a:effectRef>
-          <a:fontRef idx="minor">
-            <a:schemeClr val="lt1"/>
-          </a:fontRef>
-        </p:style>
-        <p:txBody>
-          <a:bodyPr rtlCol="0" anchor="ctr"/>
-          <a:lstStyle/>
-          <a:p>
-            <a:pPr algn="ctr"/>
-          </a:p>
-        </p:txBody>
-      </p:sp>
-      <p:sp>
-        <p:nvSpPr>
-          <p:cNvPr id="3" name="Rectangle 2"/>
-          <p:cNvSpPr/>
-          <p:nvPr/>
-        </p:nvSpPr>
-        <p:spPr>
-          <a:xfrm>
-            <a:off x="411480" y="301752"/>
-            <a:ext cx="82296" cy="548640"/>
-          </a:xfrm>
-          <a:prstGeom prst="rect">
-            <a:avLst/>
-          </a:prstGeom>
-          <a:solidFill>
-            <a:srgbClr val="FC6058"/>
-          </a:solidFill>
-          <a:ln>
-            <a:noFill/>
-          </a:ln>
-          <a:effectLst/>
-        </p:spPr>
-        <p:style>
-          <a:lnRef idx="1">
-            <a:schemeClr val="accent1"/>
-          </a:lnRef>
-          <a:fillRef idx="3">
-            <a:schemeClr val="accent1"/>
-          </a:fillRef>
-          <a:effectRef idx="2">
-            <a:schemeClr val="accent1"/>
-          </a:effectRef>
-          <a:fontRef idx="minor">
-            <a:schemeClr val="lt1"/>
-          </a:fontRef>
-        </p:style>
-        <p:txBody>
-          <a:bodyPr rtlCol="0" anchor="ctr"/>
-          <a:lstStyle/>
-          <a:p>
-            <a:pPr algn="ctr"/>
-          </a:p>
-        </p:txBody>
-      </p:sp>
-      <p:sp>
-        <p:nvSpPr>
-          <p:cNvPr id="4" name="TextBox 3"/>
-          <p:cNvSpPr txBox="1"/>
-          <p:nvPr/>
-        </p:nvSpPr>
-        <p:spPr>
-          <a:xfrm>
-            <a:off x="685800" y="201168"/>
-            <a:ext cx="10058400" cy="365760"/>
-          </a:xfrm>
-          <a:prstGeom prst="rect">
-            <a:avLst/>
-          </a:prstGeom>
-          <a:noFill/>
-        </p:spPr>
-        <p:txBody>
-          <a:bodyPr wrap="square" anchor="t" lIns="0" rIns="0" tIns="0" bIns="0">
-            <a:spAutoFit/>
-          </a:bodyPr>
-          <a:lstStyle/>
-          <a:p>
-            <a:pPr algn="l">
-              <a:spcAft>
-                <a:spcPts val="600"/>
-              </a:spcAft>
-            </a:pPr>
-            <a:r>
-              <a:rPr sz="1300" b="1">
-                <a:solidFill>
-                  <a:srgbClr val="A9BCDD"/>
-                </a:solidFill>
-                <a:latin typeface="Calibri"/>
-              </a:rPr>
-              <a:t>PERGUNTA 1</a:t>
-            </a:r>
-          </a:p>
-        </p:txBody>
-      </p:sp>
-      <p:sp>
-        <p:nvSpPr>
-          <p:cNvPr id="5" name="TextBox 4"/>
-          <p:cNvSpPr txBox="1"/>
-          <p:nvPr/>
-        </p:nvSpPr>
-        <p:spPr>
-          <a:xfrm>
-            <a:off x="685800" y="502920"/>
-            <a:ext cx="10515600" cy="640080"/>
-          </a:xfrm>
-          <a:prstGeom prst="rect">
-            <a:avLst/>
-          </a:prstGeom>
-          <a:noFill/>
-        </p:spPr>
-        <p:txBody>
-          <a:bodyPr wrap="square" anchor="t" lIns="0" rIns="0" tIns="0" bIns="0">
-            <a:spAutoFit/>
-          </a:bodyPr>
-          <a:lstStyle/>
-          <a:p>
-            <a:pPr algn="l">
-              <a:spcAft>
-                <a:spcPts val="600"/>
-              </a:spcAft>
-            </a:pPr>
-            <a:r>
-              <a:rPr sz="3000" b="1">
-                <a:solidFill>
-                  <a:srgbClr val="FFFFFF"/>
-                </a:solidFill>
-                <a:latin typeface="Calibri"/>
-              </a:rPr>
-              <a:t>Melhor perfil de imóvel (tipologia, nº de quartos)</a:t>
-            </a:r>
-          </a:p>
-        </p:txBody>
-      </p:sp>
-      <p:sp>
-        <p:nvSpPr>
-          <p:cNvPr id="6" name="TextBox 5"/>
-          <p:cNvSpPr txBox="1"/>
-          <p:nvPr/>
-        </p:nvSpPr>
-        <p:spPr>
-          <a:xfrm>
-            <a:off x="685800" y="1417320"/>
-            <a:ext cx="10789920" cy="822960"/>
-          </a:xfrm>
-          <a:prstGeom prst="rect">
-            <a:avLst/>
-          </a:prstGeom>
-          <a:noFill/>
-        </p:spPr>
-        <p:txBody>
-          <a:bodyPr wrap="square">
-            <a:spAutoFit/>
-          </a:bodyPr>
-          <a:lstStyle/>
-          <a:p>
-            <a:pPr>
-              <a:spcAft>
-                <a:spcPts val="600"/>
-              </a:spcAft>
-            </a:pPr>
-            <a:r>
-              <a:rPr sz="1700" b="1">
-                <a:solidFill>
-                  <a:srgbClr val="0E1B33"/>
-                </a:solidFill>
-              </a:rPr>
-              <a:t>• Definimos o critério: </a:t>
-            </a:r>
-            <a:r>
-              <a:rPr sz="1700">
-                <a:solidFill>
-                  <a:srgbClr val="4A5A78"/>
-                </a:solidFill>
-              </a:rPr>
-              <a:t>três óticas — receita bruta, produtividade de área (R$/m²) e retorno sobre capital.</a:t>
+              <a:t>Qual perfil? Três óticas, uma decisão</a:t>
             </a:r>
           </a:p>
         </p:txBody>
       </p:sp>
       <p:graphicFrame>
         <p:nvGraphicFramePr>
-          <p:cNvPr id="7" name="Table 6"/>
+          <p:cNvPr id="6" name="Table 5"/>
           <p:cNvGraphicFramePr>
             <a:graphicFrameLocks noGrp="1"/>
           </p:cNvGraphicFramePr>
           <p:nvPr/>
         </p:nvGraphicFramePr>
         <p:xfrm>
-          <a:off x="685800" y="2194560"/>
-          <a:ext cx="6309360" cy="3108960"/>
+          <a:off x="685800" y="1600200"/>
+          <a:ext cx="8229600" cy="3291840"/>
         </p:xfrm>
         <a:graphic>
           <a:graphicData uri="http://schemas.openxmlformats.org/drawingml/2006/table">
@@ -5547,12 +3573,12 @@
                 <a:tableStyleId>{5C22544A-7EE6-4342-B048-85BDC9FD1C3A}</a:tableStyleId>
               </a:tblPr>
               <a:tblGrid>
-                <a:gridCol w="1402080"/>
-                <a:gridCol w="1822704"/>
-                <a:gridCol w="1402080"/>
-                <a:gridCol w="1682496"/>
+                <a:gridCol w="1828800"/>
+                <a:gridCol w="2377440"/>
+                <a:gridCol w="1828800"/>
+                <a:gridCol w="2194560"/>
               </a:tblGrid>
-              <a:tr h="621792">
+              <a:tr h="658368">
                 <a:tc>
                   <a:txBody>
                     <a:bodyPr/>
@@ -5642,7 +3668,7 @@
                   </a:tcPr>
                 </a:tc>
               </a:tr>
-              <a:tr h="621792">
+              <a:tr h="658368">
                 <a:tc>
                   <a:txBody>
                     <a:bodyPr/>
@@ -5732,7 +3758,7 @@
                   </a:tcPr>
                 </a:tc>
               </a:tr>
-              <a:tr h="621792">
+              <a:tr h="658368">
                 <a:tc>
                   <a:txBody>
                     <a:bodyPr/>
@@ -5822,7 +3848,7 @@
                   </a:tcPr>
                 </a:tc>
               </a:tr>
-              <a:tr h="621792">
+              <a:tr h="658368">
                 <a:tc>
                   <a:txBody>
                     <a:bodyPr/>
@@ -5912,7 +3938,7 @@
                   </a:tcPr>
                 </a:tc>
               </a:tr>
-              <a:tr h="621792">
+              <a:tr h="658368">
                 <a:tc>
                   <a:txBody>
                     <a:bodyPr/>
@@ -6008,14 +4034,14 @@
       </p:graphicFrame>
       <p:sp>
         <p:nvSpPr>
-          <p:cNvPr id="8" name="Rectangle 7"/>
+          <p:cNvPr id="7" name="Rectangle 6"/>
           <p:cNvSpPr/>
           <p:nvPr/>
         </p:nvSpPr>
         <p:spPr>
           <a:xfrm>
-            <a:off x="7269480" y="2194560"/>
-            <a:ext cx="4206240" cy="1280160"/>
+            <a:off x="9189720" y="1600200"/>
+            <a:ext cx="2331720" cy="1371600"/>
           </a:xfrm>
           <a:prstGeom prst="rect">
             <a:avLst/>
@@ -6052,14 +4078,14 @@
       </p:sp>
       <p:sp>
         <p:nvSpPr>
-          <p:cNvPr id="9" name="TextBox 8"/>
+          <p:cNvPr id="8" name="TextBox 7"/>
           <p:cNvSpPr txBox="1"/>
           <p:nvPr/>
         </p:nvSpPr>
         <p:spPr>
           <a:xfrm>
-            <a:off x="7498079" y="2377440"/>
-            <a:ext cx="3749039" cy="1005840"/>
+            <a:off x="9372600" y="1783080"/>
+            <a:ext cx="1965960" cy="1097280"/>
           </a:xfrm>
           <a:prstGeom prst="rect">
             <a:avLst/>
@@ -6078,7 +4104,7 @@
               </a:spcAft>
             </a:pPr>
             <a:r>
-              <a:rPr sz="1600" b="1">
+              <a:rPr sz="1500" b="1">
                 <a:solidFill>
                   <a:srgbClr val="FFFFFF"/>
                 </a:solidFill>
@@ -6100,21 +4126,21 @@
                 </a:solidFill>
                 <a:latin typeface="Calibri"/>
               </a:rPr>
-              <a:t>no faturamento bruto</a:t>
-            </a:r>
-          </a:p>
-        </p:txBody>
-      </p:sp>
-      <p:sp>
-        <p:nvSpPr>
-          <p:cNvPr id="10" name="Rectangle 9"/>
+              <a:t>faturamento bruto</a:t>
+            </a:r>
+          </a:p>
+        </p:txBody>
+      </p:sp>
+      <p:sp>
+        <p:nvSpPr>
+          <p:cNvPr id="9" name="Rectangle 8"/>
           <p:cNvSpPr/>
           <p:nvPr/>
         </p:nvSpPr>
         <p:spPr>
           <a:xfrm>
-            <a:off x="7269480" y="3657600"/>
-            <a:ext cx="4206240" cy="1280160"/>
+            <a:off x="9189720" y="3108960"/>
+            <a:ext cx="2331720" cy="1371600"/>
           </a:xfrm>
           <a:prstGeom prst="rect">
             <a:avLst/>
@@ -6151,14 +4177,14 @@
       </p:sp>
       <p:sp>
         <p:nvSpPr>
-          <p:cNvPr id="11" name="TextBox 10"/>
+          <p:cNvPr id="10" name="TextBox 9"/>
           <p:cNvSpPr txBox="1"/>
           <p:nvPr/>
         </p:nvSpPr>
         <p:spPr>
           <a:xfrm>
-            <a:off x="7498079" y="3840480"/>
-            <a:ext cx="3749039" cy="1005840"/>
+            <a:off x="9372600" y="3291840"/>
+            <a:ext cx="1965960" cy="1097280"/>
           </a:xfrm>
           <a:prstGeom prst="rect">
             <a:avLst/>
@@ -6177,13 +4203,13 @@
               </a:spcAft>
             </a:pPr>
             <a:r>
-              <a:rPr sz="1600" b="1">
+              <a:rPr sz="1500" b="1">
                 <a:solidFill>
                   <a:srgbClr val="FFFFFF"/>
                 </a:solidFill>
                 <a:latin typeface="Calibri"/>
               </a:rPr>
-              <a:t>2Q é o equilíbrio</a:t>
+              <a:t>1Q </a:t>
             </a:r>
           </a:p>
           <a:p>
@@ -6199,21 +4225,21 @@
                 </a:solidFill>
                 <a:latin typeface="Calibri"/>
               </a:rPr>
-              <a:t>melhor retorno sobre capital (10,3%)</a:t>
-            </a:r>
-          </a:p>
-        </p:txBody>
-      </p:sp>
-      <p:sp>
-        <p:nvSpPr>
-          <p:cNvPr id="12" name="Rectangle 11"/>
+              <a:t>maximiza R$/m² (1.807)</a:t>
+            </a:r>
+          </a:p>
+        </p:txBody>
+      </p:sp>
+      <p:sp>
+        <p:nvSpPr>
+          <p:cNvPr id="11" name="Rectangle 10"/>
           <p:cNvSpPr/>
           <p:nvPr/>
         </p:nvSpPr>
         <p:spPr>
           <a:xfrm>
-            <a:off x="7269480" y="5120640"/>
-            <a:ext cx="4206240" cy="1280160"/>
+            <a:off x="9189720" y="4617720"/>
+            <a:ext cx="2331720" cy="1371600"/>
           </a:xfrm>
           <a:prstGeom prst="rect">
             <a:avLst/>
@@ -6250,14 +4276,14 @@
       </p:sp>
       <p:sp>
         <p:nvSpPr>
-          <p:cNvPr id="13" name="TextBox 12"/>
+          <p:cNvPr id="12" name="TextBox 11"/>
           <p:cNvSpPr txBox="1"/>
           <p:nvPr/>
         </p:nvSpPr>
         <p:spPr>
           <a:xfrm>
-            <a:off x="7498079" y="5303520"/>
-            <a:ext cx="3749039" cy="1005840"/>
+            <a:off x="9372600" y="4800600"/>
+            <a:ext cx="1965960" cy="1097280"/>
           </a:xfrm>
           <a:prstGeom prst="rect">
             <a:avLst/>
@@ -6276,13 +4302,13 @@
               </a:spcAft>
             </a:pPr>
             <a:r>
-              <a:rPr sz="1600" b="1">
+              <a:rPr sz="1500" b="1">
                 <a:solidFill>
                   <a:srgbClr val="FFFFFF"/>
                 </a:solidFill>
                 <a:latin typeface="Calibri"/>
               </a:rPr>
-              <a:t>1Q maximiza R$/m²</a:t>
+              <a:t>2Q melhor</a:t>
             </a:r>
           </a:p>
           <a:p>
@@ -6298,21 +4324,21 @@
                 </a:solidFill>
                 <a:latin typeface="Calibri"/>
               </a:rPr>
-              <a:t>(R$ 1.807) e tipo 'apartamento' domina</a:t>
-            </a:r>
-          </a:p>
-        </p:txBody>
-      </p:sp>
-      <p:sp>
-        <p:nvSpPr>
-          <p:cNvPr id="14" name="TextBox 13"/>
+              <a:t>retorno (10,3%)</a:t>
+            </a:r>
+          </a:p>
+        </p:txBody>
+      </p:sp>
+      <p:sp>
+        <p:nvSpPr>
+          <p:cNvPr id="13" name="TextBox 12"/>
           <p:cNvSpPr txBox="1"/>
           <p:nvPr/>
         </p:nvSpPr>
         <p:spPr>
           <a:xfrm>
-            <a:off x="411480" y="6446520"/>
-            <a:ext cx="4572000" cy="320040"/>
+            <a:off x="685800" y="5212080"/>
+            <a:ext cx="8229600" cy="1005840"/>
           </a:xfrm>
           <a:prstGeom prst="rect">
             <a:avLst/>
@@ -6331,6 +4357,61 @@
               </a:spcAft>
             </a:pPr>
             <a:r>
+              <a:rPr sz="2000" b="1">
+                <a:solidFill>
+                  <a:srgbClr val="0E1B33"/>
+                </a:solidFill>
+                <a:latin typeface="Calibri"/>
+              </a:rPr>
+              <a:t>Decisão: </a:t>
+            </a:r>
+          </a:p>
+          <a:p>
+            <a:pPr algn="l">
+              <a:spcAft>
+                <a:spcPts val="600"/>
+              </a:spcAft>
+            </a:pPr>
+            <a:r>
+              <a:rPr sz="2000" b="0">
+                <a:solidFill>
+                  <a:srgbClr val="4A5A78"/>
+                </a:solidFill>
+                <a:latin typeface="Calibri"/>
+              </a:rPr>
+              <a:t>apartamento 2Q — equilíbrio entre liquidez, ticket e reprodutibilidade estatística.</a:t>
+            </a:r>
+          </a:p>
+        </p:txBody>
+      </p:sp>
+      <p:sp>
+        <p:nvSpPr>
+          <p:cNvPr id="14" name="TextBox 13"/>
+          <p:cNvSpPr txBox="1"/>
+          <p:nvPr/>
+        </p:nvSpPr>
+        <p:spPr>
+          <a:xfrm>
+            <a:off x="411480" y="6446520"/>
+            <a:ext cx="4572000" cy="320040"/>
+          </a:xfrm>
+          <a:prstGeom prst="rect">
+            <a:avLst/>
+          </a:prstGeom>
+          <a:noFill/>
+        </p:spPr>
+        <p:txBody>
+          <a:bodyPr wrap="square" anchor="t" lIns="0" rIns="0" tIns="0" bIns="0">
+            <a:spAutoFit/>
+          </a:bodyPr>
+          <a:lstStyle/>
+          <a:p>
+            <a:pPr algn="l">
+              <a:spcAft>
+                <a:spcPts val="600"/>
+              </a:spcAft>
+            </a:pPr>
+            <a:r>
               <a:rPr sz="1000" b="0">
                 <a:solidFill>
                   <a:srgbClr val="4A5A78"/>
@@ -6376,7 +4457,7 @@
                 </a:solidFill>
                 <a:latin typeface="Calibri"/>
               </a:rPr>
-              <a:t>4</a:t>
+              <a:t>2</a:t>
             </a:r>
           </a:p>
         </p:txBody>
@@ -6389,7 +4470,7 @@
 </p:sld>
 </file>
 
-<file path=ppt/slides/slide5.xml><?xml version="1.0" encoding="utf-8"?>
+<file path=ppt/slides/slide3.xml><?xml version="1.0" encoding="utf-8"?>
 <p:sld xmlns:a="http://schemas.openxmlformats.org/drawingml/2006/main" xmlns:p="http://schemas.openxmlformats.org/presentationml/2006/main" xmlns:r="http://schemas.openxmlformats.org/officeDocument/2006/relationships">
   <p:cSld>
     <p:spTree>
@@ -6521,7 +4602,7 @@
                 </a:solidFill>
                 <a:latin typeface="Calibri"/>
               </a:rPr>
-              <a:t>PERGUNTA 2</a:t>
+              <a:t>RACIOCÍNIO 2 DE 2</a:t>
             </a:r>
           </a:p>
         </p:txBody>
@@ -6560,7 +4641,7 @@
                 </a:solidFill>
                 <a:latin typeface="Calibri"/>
               </a:rPr>
-              <a:t>Melhor localização em termos de receita</a:t>
+              <a:t>Onde? O que explica receita?</a:t>
             </a:r>
           </a:p>
         </p:txBody>
@@ -6574,8 +4655,8 @@
           <p:nvPr/>
         </p:nvGraphicFramePr>
         <p:xfrm>
-          <a:off x="685800" y="1737360"/>
-          <a:ext cx="6949440" cy="3474720"/>
+          <a:off x="685800" y="1463040"/>
+          <a:ext cx="5852158" cy="2926080"/>
         </p:xfrm>
         <a:graphic>
           <a:graphicData uri="http://schemas.openxmlformats.org/drawingml/2006/table">
@@ -6584,12 +4665,11 @@
                 <a:tableStyleId>{5C22544A-7EE6-4342-B048-85BDC9FD1C3A}</a:tableStyleId>
               </a:tblPr>
               <a:tblGrid>
-                <a:gridCol w="2432304"/>
-                <a:gridCol w="868680"/>
-                <a:gridCol w="1737360"/>
-                <a:gridCol w="1911096"/>
+                <a:gridCol w="2508068"/>
+                <a:gridCol w="1045028"/>
+                <a:gridCol w="2299062"/>
               </a:tblGrid>
-              <a:tr h="579120">
+              <a:tr h="731520">
                 <a:tc>
                   <a:txBody>
                     <a:bodyPr/>
@@ -6646,28 +4726,6 @@
                             <a:srgbClr val="FFFFFF"/>
                           </a:solidFill>
                         </a:rPr>
-                        <a:t>Diária mediana</a:t>
-                      </a:r>
-                    </a:p>
-                  </a:txBody>
-                  <a:tcPr>
-                    <a:solidFill>
-                      <a:srgbClr val="0E1B33"/>
-                    </a:solidFill>
-                  </a:tcPr>
-                </a:tc>
-                <a:tc>
-                  <a:txBody>
-                    <a:bodyPr/>
-                    <a:lstStyle/>
-                    <a:p>
-                      <a:pPr algn="ctr"/>
-                      <a:r>
-                        <a:rPr sz="1400" b="1">
-                          <a:solidFill>
-                            <a:srgbClr val="FFFFFF"/>
-                          </a:solidFill>
-                        </a:rPr>
                         <a:t>Receita anual (55%)</a:t>
                       </a:r>
                     </a:p>
@@ -6679,7 +4737,7 @@
                   </a:tcPr>
                 </a:tc>
               </a:tr>
-              <a:tr h="579120">
+              <a:tr h="731520">
                 <a:tc>
                   <a:txBody>
                     <a:bodyPr/>
@@ -6736,28 +4794,6 @@
                             <a:srgbClr val="0E1B33"/>
                           </a:solidFill>
                         </a:rPr>
-                        <a:t>R$ 590</a:t>
-                      </a:r>
-                    </a:p>
-                  </a:txBody>
-                  <a:tcPr>
-                    <a:solidFill>
-                      <a:srgbClr val="F4F7FC"/>
-                    </a:solidFill>
-                  </a:tcPr>
-                </a:tc>
-                <a:tc>
-                  <a:txBody>
-                    <a:bodyPr/>
-                    <a:lstStyle/>
-                    <a:p>
-                      <a:pPr algn="ctr"/>
-                      <a:r>
-                        <a:rPr sz="1500">
-                          <a:solidFill>
-                            <a:srgbClr val="0E1B33"/>
-                          </a:solidFill>
-                        </a:rPr>
                         <a:t>R$ 118,4 mil</a:t>
                       </a:r>
                     </a:p>
@@ -6769,187 +4805,7 @@
                   </a:tcPr>
                 </a:tc>
               </a:tr>
-              <a:tr h="579120">
-                <a:tc>
-                  <a:txBody>
-                    <a:bodyPr/>
-                    <a:lstStyle/>
-                    <a:p>
-                      <a:pPr algn="ctr"/>
-                      <a:r>
-                        <a:rPr sz="1500">
-                          <a:solidFill>
-                            <a:srgbClr val="0E1B33"/>
-                          </a:solidFill>
-                        </a:rPr>
-                        <a:t>CANTO DA PRAIA</a:t>
-                      </a:r>
-                    </a:p>
-                  </a:txBody>
-                  <a:tcPr>
-                    <a:solidFill>
-                      <a:srgbClr val="FFFFFF"/>
-                    </a:solidFill>
-                  </a:tcPr>
-                </a:tc>
-                <a:tc>
-                  <a:txBody>
-                    <a:bodyPr/>
-                    <a:lstStyle/>
-                    <a:p>
-                      <a:pPr algn="ctr"/>
-                      <a:r>
-                        <a:rPr sz="1500">
-                          <a:solidFill>
-                            <a:srgbClr val="0E1B33"/>
-                          </a:solidFill>
-                        </a:rPr>
-                        <a:t>8</a:t>
-                      </a:r>
-                    </a:p>
-                  </a:txBody>
-                  <a:tcPr>
-                    <a:solidFill>
-                      <a:srgbClr val="FFFFFF"/>
-                    </a:solidFill>
-                  </a:tcPr>
-                </a:tc>
-                <a:tc>
-                  <a:txBody>
-                    <a:bodyPr/>
-                    <a:lstStyle/>
-                    <a:p>
-                      <a:pPr algn="ctr"/>
-                      <a:r>
-                        <a:rPr sz="1500">
-                          <a:solidFill>
-                            <a:srgbClr val="0E1B33"/>
-                          </a:solidFill>
-                        </a:rPr>
-                        <a:t>R$ 559</a:t>
-                      </a:r>
-                    </a:p>
-                  </a:txBody>
-                  <a:tcPr>
-                    <a:solidFill>
-                      <a:srgbClr val="FFFFFF"/>
-                    </a:solidFill>
-                  </a:tcPr>
-                </a:tc>
-                <a:tc>
-                  <a:txBody>
-                    <a:bodyPr/>
-                    <a:lstStyle/>
-                    <a:p>
-                      <a:pPr algn="ctr"/>
-                      <a:r>
-                        <a:rPr sz="1500">
-                          <a:solidFill>
-                            <a:srgbClr val="0E1B33"/>
-                          </a:solidFill>
-                        </a:rPr>
-                        <a:t>R$ 112,2 mil</a:t>
-                      </a:r>
-                    </a:p>
-                  </a:txBody>
-                  <a:tcPr>
-                    <a:solidFill>
-                      <a:srgbClr val="FFFFFF"/>
-                    </a:solidFill>
-                  </a:tcPr>
-                </a:tc>
-              </a:tr>
-              <a:tr h="579120">
-                <a:tc>
-                  <a:txBody>
-                    <a:bodyPr/>
-                    <a:lstStyle/>
-                    <a:p>
-                      <a:pPr algn="ctr"/>
-                      <a:r>
-                        <a:rPr sz="1500">
-                          <a:solidFill>
-                            <a:srgbClr val="0E1B33"/>
-                          </a:solidFill>
-                        </a:rPr>
-                        <a:t>TABU. OLIVEIRAS</a:t>
-                      </a:r>
-                    </a:p>
-                  </a:txBody>
-                  <a:tcPr>
-                    <a:solidFill>
-                      <a:srgbClr val="F4F7FC"/>
-                    </a:solidFill>
-                  </a:tcPr>
-                </a:tc>
-                <a:tc>
-                  <a:txBody>
-                    <a:bodyPr/>
-                    <a:lstStyle/>
-                    <a:p>
-                      <a:pPr algn="ctr"/>
-                      <a:r>
-                        <a:rPr sz="1500">
-                          <a:solidFill>
-                            <a:srgbClr val="0E1B33"/>
-                          </a:solidFill>
-                        </a:rPr>
-                        <a:t>20</a:t>
-                      </a:r>
-                    </a:p>
-                  </a:txBody>
-                  <a:tcPr>
-                    <a:solidFill>
-                      <a:srgbClr val="F4F7FC"/>
-                    </a:solidFill>
-                  </a:tcPr>
-                </a:tc>
-                <a:tc>
-                  <a:txBody>
-                    <a:bodyPr/>
-                    <a:lstStyle/>
-                    <a:p>
-                      <a:pPr algn="ctr"/>
-                      <a:r>
-                        <a:rPr sz="1500">
-                          <a:solidFill>
-                            <a:srgbClr val="0E1B33"/>
-                          </a:solidFill>
-                        </a:rPr>
-                        <a:t>R$ 540</a:t>
-                      </a:r>
-                    </a:p>
-                  </a:txBody>
-                  <a:tcPr>
-                    <a:solidFill>
-                      <a:srgbClr val="F4F7FC"/>
-                    </a:solidFill>
-                  </a:tcPr>
-                </a:tc>
-                <a:tc>
-                  <a:txBody>
-                    <a:bodyPr/>
-                    <a:lstStyle/>
-                    <a:p>
-                      <a:pPr algn="ctr"/>
-                      <a:r>
-                        <a:rPr sz="1500">
-                          <a:solidFill>
-                            <a:srgbClr val="0E1B33"/>
-                          </a:solidFill>
-                        </a:rPr>
-                        <a:t>R$ 108,4 mil</a:t>
-                      </a:r>
-                    </a:p>
-                  </a:txBody>
-                  <a:tcPr>
-                    <a:solidFill>
-                      <a:srgbClr val="F4F7FC"/>
-                    </a:solidFill>
-                  </a:tcPr>
-                </a:tc>
-              </a:tr>
-              <a:tr h="579120">
+              <a:tr h="731520">
                 <a:tc>
                   <a:txBody>
                     <a:bodyPr/>
@@ -7006,28 +4862,6 @@
                             <a:srgbClr val="0E1B33"/>
                           </a:solidFill>
                         </a:rPr>
-                        <a:t>R$ 509</a:t>
-                      </a:r>
-                    </a:p>
-                  </a:txBody>
-                  <a:tcPr>
-                    <a:solidFill>
-                      <a:srgbClr val="FFFFFF"/>
-                    </a:solidFill>
-                  </a:tcPr>
-                </a:tc>
-                <a:tc>
-                  <a:txBody>
-                    <a:bodyPr/>
-                    <a:lstStyle/>
-                    <a:p>
-                      <a:pPr algn="ctr"/>
-                      <a:r>
-                        <a:rPr sz="1500">
-                          <a:solidFill>
-                            <a:srgbClr val="0E1B33"/>
-                          </a:solidFill>
-                        </a:rPr>
                         <a:t>R$ 102,2 mil</a:t>
                       </a:r>
                     </a:p>
@@ -7039,7 +4873,7 @@
                   </a:tcPr>
                 </a:tc>
               </a:tr>
-              <a:tr h="579120">
+              <a:tr h="731520">
                 <a:tc>
                   <a:txBody>
                     <a:bodyPr/>
@@ -7096,28 +4930,6 @@
                             <a:srgbClr val="0E1B33"/>
                           </a:solidFill>
                         </a:rPr>
-                        <a:t>R$ 471</a:t>
-                      </a:r>
-                    </a:p>
-                  </a:txBody>
-                  <a:tcPr>
-                    <a:solidFill>
-                      <a:srgbClr val="F4F7FC"/>
-                    </a:solidFill>
-                  </a:tcPr>
-                </a:tc>
-                <a:tc>
-                  <a:txBody>
-                    <a:bodyPr/>
-                    <a:lstStyle/>
-                    <a:p>
-                      <a:pPr algn="ctr"/>
-                      <a:r>
-                        <a:rPr sz="1500">
-                          <a:solidFill>
-                            <a:srgbClr val="0E1B33"/>
-                          </a:solidFill>
-                        </a:rPr>
                         <a:t>R$ 94,5 mil</a:t>
                       </a:r>
                     </a:p>
@@ -7135,20 +4947,66 @@
       </p:graphicFrame>
       <p:sp>
         <p:nvSpPr>
-          <p:cNvPr id="7" name="Rectangle 6"/>
+          <p:cNvPr id="7" name="TextBox 6"/>
+          <p:cNvSpPr txBox="1"/>
+          <p:nvPr/>
+        </p:nvSpPr>
+        <p:spPr>
+          <a:xfrm>
+            <a:off x="685800" y="4572000"/>
+            <a:ext cx="5852160" cy="1645920"/>
+          </a:xfrm>
+          <a:prstGeom prst="rect">
+            <a:avLst/>
+          </a:prstGeom>
+          <a:noFill/>
+        </p:spPr>
+        <p:txBody>
+          <a:bodyPr wrap="square">
+            <a:spAutoFit/>
+          </a:bodyPr>
+          <a:lstStyle/>
+          <a:p>
+            <a:pPr>
+              <a:spcAft>
+                <a:spcPts val="800"/>
+              </a:spcAft>
+            </a:pPr>
+            <a:r>
+              <a:rPr sz="1600" b="1">
+                <a:solidFill>
+                  <a:srgbClr val="0E1B33"/>
+                </a:solidFill>
+              </a:rPr>
+              <a:t>• Localização: </a:t>
+            </a:r>
+            <a:r>
+              <a:rPr sz="1600">
+                <a:solidFill>
+                  <a:srgbClr val="4A5A78"/>
+                </a:solidFill>
+              </a:rPr>
+              <a:t>Meia Praia lidera receita; Centro é alternativa de volume.</a:t>
+            </a:r>
+          </a:p>
+        </p:txBody>
+      </p:sp>
+      <p:sp>
+        <p:nvSpPr>
+          <p:cNvPr id="8" name="Rectangle 7"/>
           <p:cNvSpPr/>
           <p:nvPr/>
         </p:nvSpPr>
         <p:spPr>
           <a:xfrm>
-            <a:off x="7955279" y="1737360"/>
-            <a:ext cx="3566160" cy="3474720"/>
+            <a:off x="6858000" y="1463040"/>
+            <a:ext cx="4663440" cy="4754880"/>
           </a:xfrm>
           <a:prstGeom prst="rect">
             <a:avLst/>
           </a:prstGeom>
           <a:solidFill>
-            <a:srgbClr val="F4F7FC"/>
+            <a:srgbClr val="0E1B33"/>
           </a:solidFill>
           <a:ln>
             <a:noFill/>
@@ -7179,14 +5037,14 @@
       </p:sp>
       <p:sp>
         <p:nvSpPr>
-          <p:cNvPr id="8" name="TextBox 7"/>
+          <p:cNvPr id="9" name="TextBox 8"/>
           <p:cNvSpPr txBox="1"/>
           <p:nvPr/>
         </p:nvSpPr>
         <p:spPr>
           <a:xfrm>
-            <a:off x="8229600" y="1965960"/>
-            <a:ext cx="3108960" cy="457200"/>
+            <a:off x="7132320" y="1691640"/>
+            <a:ext cx="4114800" cy="457200"/>
           </a:xfrm>
           <a:prstGeom prst="rect">
             <a:avLst/>
@@ -7207,25 +5065,120 @@
             <a:r>
               <a:rPr sz="1300" b="1">
                 <a:solidFill>
-                  <a:srgbClr val="0055FF"/>
+                  <a:srgbClr val="A9BCDD"/>
                 </a:solidFill>
                 <a:latin typeface="Calibri"/>
               </a:rPr>
-              <a:t>LEITURA</a:t>
-            </a:r>
-          </a:p>
-        </p:txBody>
-      </p:sp>
-      <p:sp>
-        <p:nvSpPr>
-          <p:cNvPr id="9" name="TextBox 8"/>
+              <a:t>DRIVERS DE RECEITA (Q3)</a:t>
+            </a:r>
+          </a:p>
+        </p:txBody>
+      </p:sp>
+      <p:sp>
+        <p:nvSpPr>
+          <p:cNvPr id="10" name="TextBox 9"/>
           <p:cNvSpPr txBox="1"/>
           <p:nvPr/>
         </p:nvSpPr>
         <p:spPr>
           <a:xfrm>
-            <a:off x="8229600" y="2331720"/>
-            <a:ext cx="3108960" cy="2743200"/>
+            <a:off x="7132320" y="2240280"/>
+            <a:ext cx="4114800" cy="3657600"/>
+          </a:xfrm>
+          <a:prstGeom prst="rect">
+            <a:avLst/>
+          </a:prstGeom>
+          <a:noFill/>
+        </p:spPr>
+        <p:txBody>
+          <a:bodyPr wrap="square">
+            <a:spAutoFit/>
+          </a:bodyPr>
+          <a:lstStyle/>
+          <a:p>
+            <a:pPr>
+              <a:spcAft>
+                <a:spcPts val="1600"/>
+              </a:spcAft>
+            </a:pPr>
+            <a:r>
+              <a:rPr sz="1800" b="1">
+                <a:solidFill>
+                  <a:srgbClr val="FFFFFF"/>
+                </a:solidFill>
+              </a:rPr>
+              <a:t>Tamanho/capacidade
+</a:t>
+            </a:r>
+            <a:r>
+              <a:rPr sz="1500">
+                <a:solidFill>
+                  <a:srgbClr val="D6DFF0"/>
+                </a:solidFill>
+              </a:rPr>
+              <a:t>quartos, banheiros, hóspedes — R²=0,45</a:t>
+            </a:r>
+          </a:p>
+          <a:p>
+            <a:pPr>
+              <a:spcAft>
+                <a:spcPts val="1600"/>
+              </a:spcAft>
+            </a:pPr>
+            <a:r>
+              <a:rPr sz="1800" b="1">
+                <a:solidFill>
+                  <a:srgbClr val="FFFFFF"/>
+                </a:solidFill>
+              </a:rPr>
+              <a:t>Ratings
+</a:t>
+            </a:r>
+            <a:r>
+              <a:rPr sz="1500">
+                <a:solidFill>
+                  <a:srgbClr val="D6DFF0"/>
+                </a:solidFill>
+              </a:rPr>
+              <a:t>pouco relevantes</a:t>
+            </a:r>
+          </a:p>
+          <a:p>
+            <a:pPr>
+              <a:spcAft>
+                <a:spcPts val="1600"/>
+              </a:spcAft>
+            </a:pPr>
+            <a:r>
+              <a:rPr sz="1800" b="1">
+                <a:solidFill>
+                  <a:srgbClr val="FFFFFF"/>
+                </a:solidFill>
+              </a:rPr>
+              <a:t>Tese 'compactos 1Q no Centro'
+</a:t>
+            </a:r>
+            <a:r>
+              <a:rPr sz="1500">
+                <a:solidFill>
+                  <a:srgbClr val="D6DFF0"/>
+                </a:solidFill>
+              </a:rPr>
+              <a:t>parcialmente validada e reposicionada: ótimo é 2Q, melhor retorno em Morretes</a:t>
+            </a:r>
+          </a:p>
+        </p:txBody>
+      </p:sp>
+      <p:sp>
+        <p:nvSpPr>
+          <p:cNvPr id="11" name="TextBox 10"/>
+          <p:cNvSpPr txBox="1"/>
+          <p:nvPr/>
+        </p:nvSpPr>
+        <p:spPr>
+          <a:xfrm>
+            <a:off x="411480" y="6446520"/>
+            <a:ext cx="4572000" cy="320040"/>
           </a:xfrm>
           <a:prstGeom prst="rect">
             <a:avLst/>
@@ -7244,83 +5197,12 @@
               </a:spcAft>
             </a:pPr>
             <a:r>
-              <a:rPr sz="1600" b="1">
-                <a:solidFill>
-                  <a:srgbClr val="0E1B33"/>
+              <a:rPr sz="1000" b="0">
+                <a:solidFill>
+                  <a:srgbClr val="4A5A78"/>
                 </a:solidFill>
                 <a:latin typeface="Calibri"/>
               </a:rPr>
-              <a:t>Meia Praia lidera a receita consolidada.</a:t>
-            </a:r>
-          </a:p>
-          <a:p>
-            <a:pPr algn="l">
-              <a:spcAft>
-                <a:spcPts val="600"/>
-              </a:spcAft>
-            </a:pPr>
-            <a:r>
-              <a:rPr sz="1400" b="0">
-                <a:solidFill>
-                  <a:srgbClr val="4A5A78"/>
-                </a:solidFill>
-                <a:latin typeface="Calibri"/>
-              </a:rPr>
-              <a:t>Canto da Praia e Areal têm números altos, mas volume mínimo.</a:t>
-            </a:r>
-          </a:p>
-          <a:p>
-            <a:pPr algn="l">
-              <a:spcAft>
-                <a:spcPts val="600"/>
-              </a:spcAft>
-            </a:pPr>
-            <a:r>
-              <a:rPr sz="1400" b="0">
-                <a:solidFill>
-                  <a:srgbClr val="4A5A78"/>
-                </a:solidFill>
-                <a:latin typeface="Calibri"/>
-              </a:rPr>
-              <a:t>Centro é a alternativa relevante de maior volume na região central.</a:t>
-            </a:r>
-          </a:p>
-        </p:txBody>
-      </p:sp>
-      <p:sp>
-        <p:nvSpPr>
-          <p:cNvPr id="10" name="TextBox 9"/>
-          <p:cNvSpPr txBox="1"/>
-          <p:nvPr/>
-        </p:nvSpPr>
-        <p:spPr>
-          <a:xfrm>
-            <a:off x="411480" y="6446520"/>
-            <a:ext cx="4572000" cy="320040"/>
-          </a:xfrm>
-          <a:prstGeom prst="rect">
-            <a:avLst/>
-          </a:prstGeom>
-          <a:noFill/>
-        </p:spPr>
-        <p:txBody>
-          <a:bodyPr wrap="square" anchor="t" lIns="0" rIns="0" tIns="0" bIns="0">
-            <a:spAutoFit/>
-          </a:bodyPr>
-          <a:lstStyle/>
-          <a:p>
-            <a:pPr algn="l">
-              <a:spcAft>
-                <a:spcPts val="600"/>
-              </a:spcAft>
-            </a:pPr>
-            <a:r>
-              <a:rPr sz="1000" b="0">
-                <a:solidFill>
-                  <a:srgbClr val="4A5A78"/>
-                </a:solidFill>
-                <a:latin typeface="Calibri"/>
-              </a:rPr>
               <a:t>Seazone · Hackathon Jovens Talentos AI Builder 2026</a:t>
             </a:r>
           </a:p>
@@ -7328,7 +5210,7 @@
       </p:sp>
       <p:sp>
         <p:nvSpPr>
-          <p:cNvPr id="11" name="TextBox 10"/>
+          <p:cNvPr id="12" name="TextBox 11"/>
           <p:cNvSpPr txBox="1"/>
           <p:nvPr/>
         </p:nvSpPr>
@@ -7360,7 +5242,7 @@
                 </a:solidFill>
                 <a:latin typeface="Calibri"/>
               </a:rPr>
-              <a:t>5</a:t>
+              <a:t>3</a:t>
             </a:r>
           </a:p>
         </p:txBody>
@@ -7373,7 +5255,7 @@
 </p:sld>
 </file>
 
-<file path=ppt/slides/slide6.xml><?xml version="1.0" encoding="utf-8"?>
+<file path=ppt/slides/slide4.xml><?xml version="1.0" encoding="utf-8"?>
 <p:sld xmlns:a="http://schemas.openxmlformats.org/drawingml/2006/main" xmlns:p="http://schemas.openxmlformats.org/presentationml/2006/main" xmlns:r="http://schemas.openxmlformats.org/officeDocument/2006/relationships">
   <p:cSld>
     <p:spTree>
@@ -7505,605 +5387,7 @@
                 </a:solidFill>
                 <a:latin typeface="Calibri"/>
               </a:rPr>
-              <a:t>PERGUNTA 3</a:t>
-            </a:r>
-          </a:p>
-        </p:txBody>
-      </p:sp>
-      <p:sp>
-        <p:nvSpPr>
-          <p:cNvPr id="5" name="TextBox 4"/>
-          <p:cNvSpPr txBox="1"/>
-          <p:nvPr/>
-        </p:nvSpPr>
-        <p:spPr>
-          <a:xfrm>
-            <a:off x="685800" y="502920"/>
-            <a:ext cx="10515600" cy="640080"/>
-          </a:xfrm>
-          <a:prstGeom prst="rect">
-            <a:avLst/>
-          </a:prstGeom>
-          <a:noFill/>
-        </p:spPr>
-        <p:txBody>
-          <a:bodyPr wrap="square" anchor="t" lIns="0" rIns="0" tIns="0" bIns="0">
-            <a:spAutoFit/>
-          </a:bodyPr>
-          <a:lstStyle/>
-          <a:p>
-            <a:pPr algn="l">
-              <a:spcAft>
-                <a:spcPts val="600"/>
-              </a:spcAft>
-            </a:pPr>
-            <a:r>
-              <a:rPr sz="3000" b="1">
-                <a:solidFill>
-                  <a:srgbClr val="FFFFFF"/>
-                </a:solidFill>
-                <a:latin typeface="Calibri"/>
-              </a:rPr>
-              <a:t>O que explica as melhores receitas?</a:t>
-            </a:r>
-          </a:p>
-        </p:txBody>
-      </p:sp>
-      <p:sp>
-        <p:nvSpPr>
-          <p:cNvPr id="6" name="TextBox 5"/>
-          <p:cNvSpPr txBox="1"/>
-          <p:nvPr/>
-        </p:nvSpPr>
-        <p:spPr>
-          <a:xfrm>
-            <a:off x="685800" y="1463040"/>
-            <a:ext cx="5943600" cy="3291840"/>
-          </a:xfrm>
-          <a:prstGeom prst="rect">
-            <a:avLst/>
-          </a:prstGeom>
-          <a:noFill/>
-        </p:spPr>
-        <p:txBody>
-          <a:bodyPr wrap="square">
-            <a:spAutoFit/>
-          </a:bodyPr>
-          <a:lstStyle/>
-          <a:p>
-            <a:pPr>
-              <a:spcAft>
-                <a:spcPts val="1300"/>
-              </a:spcAft>
-            </a:pPr>
-            <a:r>
-              <a:rPr sz="1800" b="1">
-                <a:solidFill>
-                  <a:srgbClr val="0E1B33"/>
-                </a:solidFill>
-              </a:rPr>
-              <a:t>• Regressão múltipla (R²=0,45): </a:t>
-            </a:r>
-            <a:r>
-              <a:rPr sz="1800">
-                <a:solidFill>
-                  <a:srgbClr val="4A5A78"/>
-                </a:solidFill>
-              </a:rPr>
-              <a:t>nº quartos, banheiros e hóspedes são os drivers mais fortes.</a:t>
-            </a:r>
-          </a:p>
-          <a:p>
-            <a:pPr>
-              <a:spcAft>
-                <a:spcPts val="1300"/>
-              </a:spcAft>
-            </a:pPr>
-            <a:r>
-              <a:rPr sz="1800" b="1">
-                <a:solidFill>
-                  <a:srgbClr val="0E1B33"/>
-                </a:solidFill>
-              </a:rPr>
-              <a:t>• Ratings pouco relevantes: </a:t>
-            </a:r>
-            <a:r>
-              <a:rPr sz="1800">
-                <a:solidFill>
-                  <a:srgbClr val="4A5A78"/>
-                </a:solidFill>
-              </a:rPr>
-              <a:t>star_rating global não explica receita.</a:t>
-            </a:r>
-          </a:p>
-          <a:p>
-            <a:pPr>
-              <a:spcAft>
-                <a:spcPts val="1300"/>
-              </a:spcAft>
-            </a:pPr>
-            <a:r>
-              <a:rPr sz="1800" b="1">
-                <a:solidFill>
-                  <a:srgbClr val="0E1B33"/>
-                </a:solidFill>
-              </a:rPr>
-              <a:t>• Cuidado estatístico: </a:t>
-            </a:r>
-            <a:r>
-              <a:rPr sz="1800">
-                <a:solidFill>
-                  <a:srgbClr val="4A5A78"/>
-                </a:solidFill>
-              </a:rPr>
-              <a:t>coeficientes negativos de ratings = colinearidade/mix de preço, não causalidade.</a:t>
-            </a:r>
-          </a:p>
-          <a:p>
-            <a:pPr>
-              <a:spcAft>
-                <a:spcPts val="1300"/>
-              </a:spcAft>
-            </a:pPr>
-            <a:r>
-              <a:rPr sz="1800" b="1">
-                <a:solidFill>
-                  <a:srgbClr val="0E1B33"/>
-                </a:solidFill>
-              </a:rPr>
-              <a:t>• Conclusão: </a:t>
-            </a:r>
-            <a:r>
-              <a:rPr sz="1800">
-                <a:solidFill>
-                  <a:srgbClr val="4A5A78"/>
-                </a:solidFill>
-              </a:rPr>
-              <a:t>estrutura e capacidade do imóvel (tamanho) determinam a receita, não a avaliação.</a:t>
-            </a:r>
-          </a:p>
-        </p:txBody>
-      </p:sp>
-      <p:sp>
-        <p:nvSpPr>
-          <p:cNvPr id="7" name="Rectangle 6"/>
-          <p:cNvSpPr/>
-          <p:nvPr/>
-        </p:nvSpPr>
-        <p:spPr>
-          <a:xfrm>
-            <a:off x="6995160" y="1463040"/>
-            <a:ext cx="4572000" cy="4663440"/>
-          </a:xfrm>
-          <a:prstGeom prst="rect">
-            <a:avLst/>
-          </a:prstGeom>
-          <a:solidFill>
-            <a:srgbClr val="0E1B33"/>
-          </a:solidFill>
-          <a:ln>
-            <a:noFill/>
-          </a:ln>
-          <a:effectLst/>
-        </p:spPr>
-        <p:style>
-          <a:lnRef idx="1">
-            <a:schemeClr val="accent1"/>
-          </a:lnRef>
-          <a:fillRef idx="3">
-            <a:schemeClr val="accent1"/>
-          </a:fillRef>
-          <a:effectRef idx="2">
-            <a:schemeClr val="accent1"/>
-          </a:effectRef>
-          <a:fontRef idx="minor">
-            <a:schemeClr val="lt1"/>
-          </a:fontRef>
-        </p:style>
-        <p:txBody>
-          <a:bodyPr rtlCol="0" anchor="ctr"/>
-          <a:lstStyle/>
-          <a:p>
-            <a:pPr algn="ctr"/>
-          </a:p>
-        </p:txBody>
-      </p:sp>
-      <p:sp>
-        <p:nvSpPr>
-          <p:cNvPr id="8" name="TextBox 7"/>
-          <p:cNvSpPr txBox="1"/>
-          <p:nvPr/>
-        </p:nvSpPr>
-        <p:spPr>
-          <a:xfrm>
-            <a:off x="7269480" y="1691640"/>
-            <a:ext cx="4023360" cy="457200"/>
-          </a:xfrm>
-          <a:prstGeom prst="rect">
-            <a:avLst/>
-          </a:prstGeom>
-          <a:noFill/>
-        </p:spPr>
-        <p:txBody>
-          <a:bodyPr wrap="square" anchor="t" lIns="0" rIns="0" tIns="0" bIns="0">
-            <a:spAutoFit/>
-          </a:bodyPr>
-          <a:lstStyle/>
-          <a:p>
-            <a:pPr algn="l">
-              <a:spcAft>
-                <a:spcPts val="600"/>
-              </a:spcAft>
-            </a:pPr>
-            <a:r>
-              <a:rPr sz="1300" b="1">
-                <a:solidFill>
-                  <a:srgbClr val="A9BCDD"/>
-                </a:solidFill>
-                <a:latin typeface="Calibri"/>
-              </a:rPr>
-              <a:t>PRINCIPAIS DRIVERS</a:t>
-            </a:r>
-          </a:p>
-        </p:txBody>
-      </p:sp>
-      <p:sp>
-        <p:nvSpPr>
-          <p:cNvPr id="9" name="TextBox 8"/>
-          <p:cNvSpPr txBox="1"/>
-          <p:nvPr/>
-        </p:nvSpPr>
-        <p:spPr>
-          <a:xfrm>
-            <a:off x="7269480" y="2240280"/>
-            <a:ext cx="4023360" cy="3657600"/>
-          </a:xfrm>
-          <a:prstGeom prst="rect">
-            <a:avLst/>
-          </a:prstGeom>
-          <a:noFill/>
-        </p:spPr>
-        <p:txBody>
-          <a:bodyPr wrap="square">
-            <a:spAutoFit/>
-          </a:bodyPr>
-          <a:lstStyle/>
-          <a:p>
-            <a:pPr>
-              <a:spcAft>
-                <a:spcPts val="1400"/>
-              </a:spcAft>
-            </a:pPr>
-            <a:r>
-              <a:rPr sz="1800" b="1">
-                <a:solidFill>
-                  <a:srgbClr val="FFFFFF"/>
-                </a:solidFill>
-              </a:rPr>
-              <a:t>Quartos</a:t>
-            </a:r>
-            <a:r>
-              <a:rPr sz="1800">
-                <a:solidFill>
-                  <a:srgbClr val="FC6058"/>
-                </a:solidFill>
-              </a:rPr>
-              <a:t>	+21,1 ▲</a:t>
-            </a:r>
-          </a:p>
-          <a:p>
-            <a:pPr>
-              <a:spcAft>
-                <a:spcPts val="1400"/>
-              </a:spcAft>
-            </a:pPr>
-            <a:r>
-              <a:rPr sz="1800" b="1">
-                <a:solidFill>
-                  <a:srgbClr val="FFFFFF"/>
-                </a:solidFill>
-              </a:rPr>
-              <a:t>Banheiros</a:t>
-            </a:r>
-            <a:r>
-              <a:rPr sz="1800">
-                <a:solidFill>
-                  <a:srgbClr val="FC6058"/>
-                </a:solidFill>
-              </a:rPr>
-              <a:t>	+18,8 ▲</a:t>
-            </a:r>
-          </a:p>
-          <a:p>
-            <a:pPr>
-              <a:spcAft>
-                <a:spcPts val="1400"/>
-              </a:spcAft>
-            </a:pPr>
-            <a:r>
-              <a:rPr sz="1800" b="1">
-                <a:solidFill>
-                  <a:srgbClr val="FFFFFF"/>
-                </a:solidFill>
-              </a:rPr>
-              <a:t>Hóspedes</a:t>
-            </a:r>
-            <a:r>
-              <a:rPr sz="1800">
-                <a:solidFill>
-                  <a:srgbClr val="FC6058"/>
-                </a:solidFill>
-              </a:rPr>
-              <a:t>	+13,6 ▲</a:t>
-            </a:r>
-          </a:p>
-          <a:p>
-            <a:pPr>
-              <a:spcAft>
-                <a:spcPts val="1400"/>
-              </a:spcAft>
-            </a:pPr>
-            <a:r>
-              <a:rPr sz="1800" b="1">
-                <a:solidFill>
-                  <a:srgbClr val="FFFFFF"/>
-                </a:solidFill>
-              </a:rPr>
-              <a:t>Precisão do anúncio</a:t>
-            </a:r>
-            <a:r>
-              <a:rPr sz="1800">
-                <a:solidFill>
-                  <a:srgbClr val="FC6058"/>
-                </a:solidFill>
-              </a:rPr>
-              <a:t>	+22,8 ▲</a:t>
-            </a:r>
-          </a:p>
-          <a:p>
-            <a:pPr>
-              <a:spcAft>
-                <a:spcPts val="1400"/>
-              </a:spcAft>
-            </a:pPr>
-            <a:r>
-              <a:rPr sz="1800" b="1">
-                <a:solidFill>
-                  <a:srgbClr val="FFFFFF"/>
-                </a:solidFill>
-              </a:rPr>
-              <a:t>Satisfação</a:t>
-            </a:r>
-            <a:r>
-              <a:rPr sz="1800">
-                <a:solidFill>
-                  <a:srgbClr val="FC6058"/>
-                </a:solidFill>
-              </a:rPr>
-              <a:t>	+8,8 ▲</a:t>
-            </a:r>
-          </a:p>
-        </p:txBody>
-      </p:sp>
-      <p:sp>
-        <p:nvSpPr>
-          <p:cNvPr id="10" name="TextBox 9"/>
-          <p:cNvSpPr txBox="1"/>
-          <p:nvPr/>
-        </p:nvSpPr>
-        <p:spPr>
-          <a:xfrm>
-            <a:off x="411480" y="6446520"/>
-            <a:ext cx="4572000" cy="320040"/>
-          </a:xfrm>
-          <a:prstGeom prst="rect">
-            <a:avLst/>
-          </a:prstGeom>
-          <a:noFill/>
-        </p:spPr>
-        <p:txBody>
-          <a:bodyPr wrap="square" anchor="t" lIns="0" rIns="0" tIns="0" bIns="0">
-            <a:spAutoFit/>
-          </a:bodyPr>
-          <a:lstStyle/>
-          <a:p>
-            <a:pPr algn="l">
-              <a:spcAft>
-                <a:spcPts val="600"/>
-              </a:spcAft>
-            </a:pPr>
-            <a:r>
-              <a:rPr sz="1000" b="0">
-                <a:solidFill>
-                  <a:srgbClr val="4A5A78"/>
-                </a:solidFill>
-                <a:latin typeface="Calibri"/>
-              </a:rPr>
-              <a:t>Seazone · Hackathon Jovens Talentos AI Builder 2026</a:t>
-            </a:r>
-          </a:p>
-        </p:txBody>
-      </p:sp>
-      <p:sp>
-        <p:nvSpPr>
-          <p:cNvPr id="11" name="TextBox 10"/>
-          <p:cNvSpPr txBox="1"/>
-          <p:nvPr/>
-        </p:nvSpPr>
-        <p:spPr>
-          <a:xfrm>
-            <a:off x="11247120" y="6446520"/>
-            <a:ext cx="640080" cy="320040"/>
-          </a:xfrm>
-          <a:prstGeom prst="rect">
-            <a:avLst/>
-          </a:prstGeom>
-          <a:noFill/>
-        </p:spPr>
-        <p:txBody>
-          <a:bodyPr wrap="square" anchor="t" lIns="0" rIns="0" tIns="0" bIns="0">
-            <a:spAutoFit/>
-          </a:bodyPr>
-          <a:lstStyle/>
-          <a:p>
-            <a:pPr algn="r">
-              <a:spcAft>
-                <a:spcPts val="600"/>
-              </a:spcAft>
-            </a:pPr>
-            <a:r>
-              <a:rPr sz="1200" b="0">
-                <a:solidFill>
-                  <a:srgbClr val="4A5A78"/>
-                </a:solidFill>
-                <a:latin typeface="Calibri"/>
-              </a:rPr>
-              <a:t>6</a:t>
-            </a:r>
-          </a:p>
-        </p:txBody>
-      </p:sp>
-    </p:spTree>
-  </p:cSld>
-  <p:clrMapOvr>
-    <a:masterClrMapping/>
-  </p:clrMapOvr>
-</p:sld>
-</file>
-
-<file path=ppt/slides/slide7.xml><?xml version="1.0" encoding="utf-8"?>
-<p:sld xmlns:a="http://schemas.openxmlformats.org/drawingml/2006/main" xmlns:p="http://schemas.openxmlformats.org/presentationml/2006/main" xmlns:r="http://schemas.openxmlformats.org/officeDocument/2006/relationships">
-  <p:cSld>
-    <p:spTree>
-      <p:nvGrpSpPr>
-        <p:cNvPr id="1" name=""/>
-        <p:cNvGrpSpPr/>
-        <p:nvPr/>
-      </p:nvGrpSpPr>
-      <p:grpSpPr/>
-      <p:sp>
-        <p:nvSpPr>
-          <p:cNvPr id="2" name="Rectangle 1"/>
-          <p:cNvSpPr/>
-          <p:nvPr/>
-        </p:nvSpPr>
-        <p:spPr>
-          <a:xfrm>
-            <a:off x="0" y="0"/>
-            <a:ext cx="12191695" cy="1143000"/>
-          </a:xfrm>
-          <a:prstGeom prst="rect">
-            <a:avLst/>
-          </a:prstGeom>
-          <a:solidFill>
-            <a:srgbClr val="0E1B33"/>
-          </a:solidFill>
-          <a:ln>
-            <a:noFill/>
-          </a:ln>
-          <a:effectLst/>
-        </p:spPr>
-        <p:style>
-          <a:lnRef idx="1">
-            <a:schemeClr val="accent1"/>
-          </a:lnRef>
-          <a:fillRef idx="3">
-            <a:schemeClr val="accent1"/>
-          </a:fillRef>
-          <a:effectRef idx="2">
-            <a:schemeClr val="accent1"/>
-          </a:effectRef>
-          <a:fontRef idx="minor">
-            <a:schemeClr val="lt1"/>
-          </a:fontRef>
-        </p:style>
-        <p:txBody>
-          <a:bodyPr rtlCol="0" anchor="ctr"/>
-          <a:lstStyle/>
-          <a:p>
-            <a:pPr algn="ctr"/>
-          </a:p>
-        </p:txBody>
-      </p:sp>
-      <p:sp>
-        <p:nvSpPr>
-          <p:cNvPr id="3" name="Rectangle 2"/>
-          <p:cNvSpPr/>
-          <p:nvPr/>
-        </p:nvSpPr>
-        <p:spPr>
-          <a:xfrm>
-            <a:off x="411480" y="301752"/>
-            <a:ext cx="82296" cy="548640"/>
-          </a:xfrm>
-          <a:prstGeom prst="rect">
-            <a:avLst/>
-          </a:prstGeom>
-          <a:solidFill>
-            <a:srgbClr val="FC6058"/>
-          </a:solidFill>
-          <a:ln>
-            <a:noFill/>
-          </a:ln>
-          <a:effectLst/>
-        </p:spPr>
-        <p:style>
-          <a:lnRef idx="1">
-            <a:schemeClr val="accent1"/>
-          </a:lnRef>
-          <a:fillRef idx="3">
-            <a:schemeClr val="accent1"/>
-          </a:fillRef>
-          <a:effectRef idx="2">
-            <a:schemeClr val="accent1"/>
-          </a:effectRef>
-          <a:fontRef idx="minor">
-            <a:schemeClr val="lt1"/>
-          </a:fontRef>
-        </p:style>
-        <p:txBody>
-          <a:bodyPr rtlCol="0" anchor="ctr"/>
-          <a:lstStyle/>
-          <a:p>
-            <a:pPr algn="ctr"/>
-          </a:p>
-        </p:txBody>
-      </p:sp>
-      <p:sp>
-        <p:nvSpPr>
-          <p:cNvPr id="4" name="TextBox 3"/>
-          <p:cNvSpPr txBox="1"/>
-          <p:nvPr/>
-        </p:nvSpPr>
-        <p:spPr>
-          <a:xfrm>
-            <a:off x="685800" y="201168"/>
-            <a:ext cx="10058400" cy="365760"/>
-          </a:xfrm>
-          <a:prstGeom prst="rect">
-            <a:avLst/>
-          </a:prstGeom>
-          <a:noFill/>
-        </p:spPr>
-        <p:txBody>
-          <a:bodyPr wrap="square" anchor="t" lIns="0" rIns="0" tIns="0" bIns="0">
-            <a:spAutoFit/>
-          </a:bodyPr>
-          <a:lstStyle/>
-          <a:p>
-            <a:pPr algn="l">
-              <a:spcAft>
-                <a:spcPts val="600"/>
-              </a:spcAft>
-            </a:pPr>
-            <a:r>
-              <a:rPr sz="1300" b="1">
-                <a:solidFill>
-                  <a:srgbClr val="A9BCDD"/>
-                </a:solidFill>
-                <a:latin typeface="Calibri"/>
-              </a:rPr>
-              <a:t>PERGUNTA 4</a:t>
+              <a:t>A RECOMENDAÇÃO</a:t>
             </a:r>
           </a:p>
         </p:txBody>
@@ -8156,8 +5440,8 @@
           <p:nvPr/>
         </p:nvGraphicFramePr>
         <p:xfrm>
-          <a:off x="685800" y="1600200"/>
-          <a:ext cx="6949440" cy="2651760"/>
+          <a:off x="685800" y="1554480"/>
+          <a:ext cx="6949439" cy="2651760"/>
         </p:xfrm>
         <a:graphic>
           <a:graphicData uri="http://schemas.openxmlformats.org/drawingml/2006/table">
@@ -8166,9 +5450,10 @@
                 <a:tableStyleId>{5C22544A-7EE6-4342-B048-85BDC9FD1C3A}</a:tableStyleId>
               </a:tblPr>
               <a:tblGrid>
-                <a:gridCol w="2702560"/>
-                <a:gridCol w="1930400"/>
-                <a:gridCol w="2316480"/>
+                <a:gridCol w="2053243"/>
+                <a:gridCol w="1579418"/>
+                <a:gridCol w="1737360"/>
+                <a:gridCol w="1579418"/>
               </a:tblGrid>
               <a:tr h="662940">
                 <a:tc>
@@ -8227,7 +5512,29 @@
                             <a:srgbClr val="FFFFFF"/>
                           </a:solidFill>
                         </a:rPr>
-                        <a:t>Retorno Liq. Encargos 55%</a:t>
+                        <a:t>Ret. Liq. Encargos 55%</a:t>
+                      </a:r>
+                    </a:p>
+                  </a:txBody>
+                  <a:tcPr>
+                    <a:solidFill>
+                      <a:srgbClr val="0E1B33"/>
+                    </a:solidFill>
+                  </a:tcPr>
+                </a:tc>
+                <a:tc>
+                  <a:txBody>
+                    <a:bodyPr/>
+                    <a:lstStyle/>
+                    <a:p>
+                      <a:pPr algn="ctr"/>
+                      <a:r>
+                        <a:rPr sz="1400" b="1">
+                          <a:solidFill>
+                            <a:srgbClr val="FFFFFF"/>
+                          </a:solidFill>
+                        </a:rPr>
+                        <a:t>Preço mediano</a:t>
                       </a:r>
                     </a:p>
                   </a:txBody>
@@ -8246,7 +5553,7 @@
                     <a:p>
                       <a:pPr algn="ctr"/>
                       <a:r>
-                        <a:rPr sz="1600">
+                        <a:rPr sz="1500">
                           <a:solidFill>
                             <a:srgbClr val="0E1B33"/>
                           </a:solidFill>
@@ -8268,7 +5575,7 @@
                     <a:p>
                       <a:pPr algn="ctr"/>
                       <a:r>
-                        <a:rPr sz="1600">
+                        <a:rPr sz="1500">
                           <a:solidFill>
                             <a:srgbClr val="0E1B33"/>
                           </a:solidFill>
@@ -8290,12 +5597,34 @@
                     <a:p>
                       <a:pPr algn="ctr"/>
                       <a:r>
-                        <a:rPr sz="1600">
+                        <a:rPr sz="1500">
                           <a:solidFill>
                             <a:srgbClr val="0E1B33"/>
                           </a:solidFill>
                         </a:rPr>
                         <a:t>10,8%</a:t>
+                      </a:r>
+                    </a:p>
+                  </a:txBody>
+                  <a:tcPr>
+                    <a:solidFill>
+                      <a:srgbClr val="F4F7FC"/>
+                    </a:solidFill>
+                  </a:tcPr>
+                </a:tc>
+                <a:tc>
+                  <a:txBody>
+                    <a:bodyPr/>
+                    <a:lstStyle/>
+                    <a:p>
+                      <a:pPr algn="ctr"/>
+                      <a:r>
+                        <a:rPr sz="1500">
+                          <a:solidFill>
+                            <a:srgbClr val="0E1B33"/>
+                          </a:solidFill>
+                        </a:rPr>
+                        <a:t>R$ 790 mil</a:t>
                       </a:r>
                     </a:p>
                   </a:txBody>
@@ -8314,7 +5643,7 @@
                     <a:p>
                       <a:pPr algn="ctr"/>
                       <a:r>
-                        <a:rPr sz="1600">
+                        <a:rPr sz="1500">
                           <a:solidFill>
                             <a:srgbClr val="0E1B33"/>
                           </a:solidFill>
@@ -8336,7 +5665,7 @@
                     <a:p>
                       <a:pPr algn="ctr"/>
                       <a:r>
-                        <a:rPr sz="1600">
+                        <a:rPr sz="1500">
                           <a:solidFill>
                             <a:srgbClr val="0E1B33"/>
                           </a:solidFill>
@@ -8358,12 +5687,34 @@
                     <a:p>
                       <a:pPr algn="ctr"/>
                       <a:r>
-                        <a:rPr sz="1600">
+                        <a:rPr sz="1500">
                           <a:solidFill>
                             <a:srgbClr val="0E1B33"/>
                           </a:solidFill>
                         </a:rPr>
                         <a:t>9,2%</a:t>
+                      </a:r>
+                    </a:p>
+                  </a:txBody>
+                  <a:tcPr>
+                    <a:solidFill>
+                      <a:srgbClr val="FFFFFF"/>
+                    </a:solidFill>
+                  </a:tcPr>
+                </a:tc>
+                <a:tc>
+                  <a:txBody>
+                    <a:bodyPr/>
+                    <a:lstStyle/>
+                    <a:p>
+                      <a:pPr algn="ctr"/>
+                      <a:r>
+                        <a:rPr sz="1500">
+                          <a:solidFill>
+                            <a:srgbClr val="0E1B33"/>
+                          </a:solidFill>
+                        </a:rPr>
+                        <a:t>R$ 1,145M</a:t>
                       </a:r>
                     </a:p>
                   </a:txBody>
@@ -8382,7 +5733,7 @@
                     <a:p>
                       <a:pPr algn="ctr"/>
                       <a:r>
-                        <a:rPr sz="1600">
+                        <a:rPr sz="1500">
                           <a:solidFill>
                             <a:srgbClr val="0E1B33"/>
                           </a:solidFill>
@@ -8404,7 +5755,7 @@
                     <a:p>
                       <a:pPr algn="ctr"/>
                       <a:r>
-                        <a:rPr sz="1600">
+                        <a:rPr sz="1500">
                           <a:solidFill>
                             <a:srgbClr val="0E1B33"/>
                           </a:solidFill>
@@ -8426,7 +5777,7 @@
                     <a:p>
                       <a:pPr algn="ctr"/>
                       <a:r>
-                        <a:rPr sz="1600">
+                        <a:rPr sz="1500">
                           <a:solidFill>
                             <a:srgbClr val="0E1B33"/>
                           </a:solidFill>
@@ -8441,6 +5792,28 @@
                     </a:solidFill>
                   </a:tcPr>
                 </a:tc>
+                <a:tc>
+                  <a:txBody>
+                    <a:bodyPr/>
+                    <a:lstStyle/>
+                    <a:p>
+                      <a:pPr algn="ctr"/>
+                      <a:r>
+                        <a:rPr sz="1500">
+                          <a:solidFill>
+                            <a:srgbClr val="0E1B33"/>
+                          </a:solidFill>
+                        </a:rPr>
+                        <a:t>R$ 1,065M</a:t>
+                      </a:r>
+                    </a:p>
+                  </a:txBody>
+                  <a:tcPr>
+                    <a:solidFill>
+                      <a:srgbClr val="F4F7FC"/>
+                    </a:solidFill>
+                  </a:tcPr>
+                </a:tc>
               </a:tr>
             </a:tbl>
           </a:graphicData>
@@ -8454,8 +5827,8 @@
         </p:nvSpPr>
         <p:spPr>
           <a:xfrm>
-            <a:off x="685800" y="4572000"/>
-            <a:ext cx="6949440" cy="2011680"/>
+            <a:off x="685800" y="4480560"/>
+            <a:ext cx="6949440" cy="1828800"/>
           </a:xfrm>
           <a:prstGeom prst="rect">
             <a:avLst/>
@@ -8470,34 +5843,34 @@
           <a:p>
             <a:pPr>
               <a:spcAft>
-                <a:spcPts val="800"/>
+                <a:spcPts val="700"/>
               </a:spcAft>
             </a:pPr>
             <a:r>
-              <a:rPr sz="1600" b="1">
+              <a:rPr sz="1500" b="1">
                 <a:solidFill>
                   <a:srgbClr val="0E1B33"/>
                 </a:solidFill>
               </a:rPr>
-              <a:t>• Por que 2Q em Morretes: </a:t>
-            </a:r>
-            <a:r>
-              <a:rPr sz="1600">
+              <a:t>• Racional: </a:t>
+            </a:r>
+            <a:r>
+              <a:rPr sz="1500">
                 <a:solidFill>
                   <a:srgbClr val="4A5A78"/>
                 </a:solidFill>
               </a:rPr>
-              <a:t>melhor retorno (bruto 11,3%) com preço acessível (R$ 790 mil).</a:t>
+              <a:t>Morretes 2Q combina melhor retorno (10,8% líquido) com preço acessível (R$ 790 mil).</a:t>
             </a:r>
           </a:p>
           <a:p>
             <a:pPr>
               <a:spcAft>
-                <a:spcPts val="800"/>
+                <a:spcPts val="700"/>
               </a:spcAft>
             </a:pPr>
             <a:r>
-              <a:rPr sz="1600" b="1">
+              <a:rPr sz="1500" b="1">
                 <a:solidFill>
                   <a:srgbClr val="0E1B33"/>
                 </a:solidFill>
@@ -8505,7 +5878,7 @@
               <a:t>• Confiança: </a:t>
             </a:r>
             <a:r>
-              <a:rPr sz="1600">
+              <a:rPr sz="1500">
                 <a:solidFill>
                   <a:srgbClr val="4A5A78"/>
                 </a:solidFill>
@@ -8516,11 +5889,11 @@
           <a:p>
             <a:pPr>
               <a:spcAft>
-                <a:spcPts val="800"/>
+                <a:spcPts val="700"/>
               </a:spcAft>
             </a:pPr>
             <a:r>
-              <a:rPr sz="1600" b="1">
+              <a:rPr sz="1500" b="1">
                 <a:solidFill>
                   <a:srgbClr val="0E1B33"/>
                 </a:solidFill>
@@ -8528,12 +5901,12 @@
               <a:t>• Equilíbrio: </a:t>
             </a:r>
             <a:r>
-              <a:rPr sz="1600">
+              <a:rPr sz="1500">
                 <a:solidFill>
                   <a:srgbClr val="4A5A78"/>
                 </a:solidFill>
               </a:rPr>
-              <a:t>liquidez, menor barreira de entrada e reprodutibilidade estatística.</a:t>
+              <a:t>liquidez, menor barreira de entrada e reprodutibilidade estatística &gt; taxa nominal máxima.</a:t>
             </a:r>
           </a:p>
         </p:txBody>
@@ -8546,14 +5919,14 @@
         </p:nvSpPr>
         <p:spPr>
           <a:xfrm>
-            <a:off x="7955279" y="1600200"/>
+            <a:off x="7955279" y="1554480"/>
             <a:ext cx="3566160" cy="4480560"/>
           </a:xfrm>
           <a:prstGeom prst="rect">
             <a:avLst/>
           </a:prstGeom>
           <a:solidFill>
-            <a:srgbClr val="FC6058"/>
+            <a:srgbClr val="F4F7FC"/>
           </a:solidFill>
           <a:ln>
             <a:noFill/>
@@ -8590,8 +5963,8 @@
         </p:nvSpPr>
         <p:spPr>
           <a:xfrm>
-            <a:off x="8183879" y="1828800"/>
-            <a:ext cx="3108960" cy="457200"/>
+            <a:off x="8183879" y="1783080"/>
+            <a:ext cx="3108960" cy="365760"/>
           </a:xfrm>
           <a:prstGeom prst="rect">
             <a:avLst/>
@@ -8612,11 +5985,11 @@
             <a:r>
               <a:rPr sz="1300" b="1">
                 <a:solidFill>
-                  <a:srgbClr val="FFFFFF"/>
+                  <a:srgbClr val="0055FF"/>
                 </a:solidFill>
                 <a:latin typeface="Calibri"/>
               </a:rPr>
-              <a:t>COMO COMPARAR</a:t>
+              <a:t>COMO CALCULAMOS</a:t>
             </a:r>
           </a:p>
         </p:txBody>
@@ -8630,7 +6003,7 @@
         <p:spPr>
           <a:xfrm>
             <a:off x="8183879" y="2194560"/>
-            <a:ext cx="3108960" cy="3749039"/>
+            <a:ext cx="3108960" cy="3657600"/>
           </a:xfrm>
           <a:prstGeom prst="rect">
             <a:avLst/>
@@ -8649,13 +6022,13 @@
               </a:spcAft>
             </a:pPr>
             <a:r>
-              <a:rPr sz="1500" b="0">
-                <a:solidFill>
-                  <a:srgbClr val="FFFFFF"/>
+              <a:rPr sz="1500" b="1">
+                <a:solidFill>
+                  <a:srgbClr val="0E1B33"/>
                 </a:solidFill>
                 <a:latin typeface="Calibri"/>
               </a:rPr>
-              <a:t>Receita bruta = diária mediana × 365 × ocupação.</a:t>
+              <a:t>Receita = diária mediana × 365 × ocupação.</a:t>
             </a:r>
           </a:p>
           <a:p>
@@ -8665,13 +6038,13 @@
               </a:spcAft>
             </a:pPr>
             <a:r>
-              <a:rPr sz="1500" b="0">
-                <a:solidFill>
-                  <a:srgbClr val="FFFFFF"/>
+              <a:rPr sz="1400" b="0">
+                <a:solidFill>
+                  <a:srgbClr val="4A5A78"/>
                 </a:solidFill>
                 <a:latin typeface="Calibri"/>
               </a:rPr>
-              <a:t>Retr. líquido = receita − condomínio×12 − IPTU.</a:t>
+              <a:t>Cenários de ocupação: 40% / 55% / 70%.</a:t>
             </a:r>
           </a:p>
           <a:p>
@@ -8681,13 +6054,13 @@
               </a:spcAft>
             </a:pPr>
             <a:r>
-              <a:rPr sz="1500" b="0">
-                <a:solidFill>
-                  <a:srgbClr val="FFFFFF"/>
+              <a:rPr sz="1400" b="0">
+                <a:solidFill>
+                  <a:srgbClr val="4A5A78"/>
                 </a:solidFill>
                 <a:latin typeface="Calibri"/>
               </a:rPr>
-              <a:t>3 cenários: 40% / 55% / 70%.</a:t>
+              <a:t>Retorno líquido = receita − condomínio×12 − IPTU.</a:t>
             </a:r>
           </a:p>
           <a:p>
@@ -8697,13 +6070,13 @@
               </a:spcAft>
             </a:pPr>
             <a:r>
-              <a:rPr sz="1300" b="0">
-                <a:solidFill>
-                  <a:srgbClr val="FFFFFF"/>
+              <a:rPr sz="1200" b="0">
+                <a:solidFill>
+                  <a:srgbClr val="4A5A78"/>
                 </a:solidFill>
                 <a:latin typeface="Calibri"/>
               </a:rPr>
-              <a:t>Não conta opex (limpeza, energia, taxa de plataforma).</a:t>
+              <a:t>Não inclui opex (limpeza, energia, taxa da plataforma).</a:t>
             </a:r>
           </a:p>
         </p:txBody>
@@ -8781,7 +6154,7 @@
                 </a:solidFill>
                 <a:latin typeface="Calibri"/>
               </a:rPr>
-              <a:t>7</a:t>
+              <a:t>4</a:t>
             </a:r>
           </a:p>
         </p:txBody>
@@ -8794,7 +6167,7 @@
 </p:sld>
 </file>
 
-<file path=ppt/slides/slide8.xml><?xml version="1.0" encoding="utf-8"?>
+<file path=ppt/slides/slide5.xml><?xml version="1.0" encoding="utf-8"?>
 <p:sld xmlns:a="http://schemas.openxmlformats.org/drawingml/2006/main" xmlns:p="http://schemas.openxmlformats.org/presentationml/2006/main" xmlns:r="http://schemas.openxmlformats.org/officeDocument/2006/relationships">
   <p:cSld>
     <p:spTree>
@@ -8926,7 +6299,7 @@
                 </a:solidFill>
                 <a:latin typeface="Calibri"/>
               </a:rPr>
-              <a:t>POSIÇÃO SOBRE A TESE</a:t>
+              <a:t>PROCESSO</a:t>
             </a:r>
           </a:p>
         </p:txBody>
@@ -8965,27 +6338,238 @@
                 </a:solidFill>
                 <a:latin typeface="Calibri"/>
               </a:rPr>
-              <a:t>Compactos (1Q) no Centro — os dados sustentam?</a:t>
-            </a:r>
-          </a:p>
-        </p:txBody>
-      </p:sp>
-      <p:sp>
-        <p:nvSpPr>
-          <p:cNvPr id="6" name="Rectangle 5"/>
+              <a:t>Como a IA foi usada</a:t>
+            </a:r>
+          </a:p>
+        </p:txBody>
+      </p:sp>
+      <p:sp>
+        <p:nvSpPr>
+          <p:cNvPr id="6" name="TextBox 5"/>
+          <p:cNvSpPr txBox="1"/>
+          <p:nvPr/>
+        </p:nvSpPr>
+        <p:spPr>
+          <a:xfrm>
+            <a:off x="685800" y="1554480"/>
+            <a:ext cx="10789920" cy="4389120"/>
+          </a:xfrm>
+          <a:prstGeom prst="rect">
+            <a:avLst/>
+          </a:prstGeom>
+          <a:noFill/>
+        </p:spPr>
+        <p:txBody>
+          <a:bodyPr wrap="square">
+            <a:spAutoFit/>
+          </a:bodyPr>
+          <a:lstStyle/>
+          <a:p>
+            <a:pPr>
+              <a:spcAft>
+                <a:spcPts val="1400"/>
+              </a:spcAft>
+            </a:pPr>
+            <a:r>
+              <a:rPr sz="1900" b="1">
+                <a:solidFill>
+                  <a:srgbClr val="0E1B33"/>
+                </a:solidFill>
+              </a:rPr>
+              <a:t>• Ferramenta colaborativa, decisão humana: </a:t>
+            </a:r>
+            <a:r>
+              <a:rPr sz="1900">
+                <a:solidFill>
+                  <a:srgbClr val="4A5A78"/>
+                </a:solidFill>
+              </a:rPr>
+              <a:t>a IA testou hipóteses; o analista decidiu cada critério.</a:t>
+            </a:r>
+          </a:p>
+          <a:p>
+            <a:pPr>
+              <a:spcAft>
+                <a:spcPts val="1400"/>
+              </a:spcAft>
+            </a:pPr>
+            <a:r>
+              <a:rPr sz="1900" b="1">
+                <a:solidFill>
+                  <a:srgbClr val="0E1B33"/>
+                </a:solidFill>
+              </a:rPr>
+              <a:t>• Ponto de virada (Price_AV): </a:t>
+            </a:r>
+            <a:r>
+              <a:rPr sz="1900">
+                <a:solidFill>
+                  <a:srgbClr val="4A5A78"/>
+                </a:solidFill>
+              </a:rPr>
+              <a:t>diagnóstico mostrou que o dado é disponibilidade, não ocupação → modelamos por cenários.</a:t>
+            </a:r>
+          </a:p>
+          <a:p>
+            <a:pPr>
+              <a:spcAft>
+                <a:spcPts val="1400"/>
+              </a:spcAft>
+            </a:pPr>
+            <a:r>
+              <a:rPr sz="1900" b="1">
+                <a:solidFill>
+                  <a:srgbClr val="0E1B33"/>
+                </a:solidFill>
+              </a:rPr>
+              <a:t>• Qualidade: </a:t>
+            </a:r>
+            <a:r>
+              <a:rPr sz="1900">
+                <a:solidFill>
+                  <a:srgbClr val="4A5A78"/>
+                </a:solidFill>
+              </a:rPr>
+              <a:t>detectou inconsistências (owner duplicado, n pequeno, colinearidade) e auditou o relatório como revisor sênior.</a:t>
+            </a:r>
+          </a:p>
+          <a:p>
+            <a:pPr>
+              <a:spcAft>
+                <a:spcPts val="1400"/>
+              </a:spcAft>
+            </a:pPr>
+            <a:r>
+              <a:rPr sz="1900" b="1">
+                <a:solidFill>
+                  <a:srgbClr val="0E1B33"/>
+                </a:solidFill>
+              </a:rPr>
+              <a:t>• Rastreabilidade: </a:t>
+            </a:r>
+            <a:r>
+              <a:rPr sz="1900">
+                <a:solidFill>
+                  <a:srgbClr val="4A5A78"/>
+                </a:solidFill>
+              </a:rPr>
+              <a:t>conversa completa em ai-log/ e scripts 01–16.</a:t>
+            </a:r>
+          </a:p>
+        </p:txBody>
+      </p:sp>
+      <p:sp>
+        <p:nvSpPr>
+          <p:cNvPr id="7" name="TextBox 6"/>
+          <p:cNvSpPr txBox="1"/>
+          <p:nvPr/>
+        </p:nvSpPr>
+        <p:spPr>
+          <a:xfrm>
+            <a:off x="411480" y="6446520"/>
+            <a:ext cx="4572000" cy="320040"/>
+          </a:xfrm>
+          <a:prstGeom prst="rect">
+            <a:avLst/>
+          </a:prstGeom>
+          <a:noFill/>
+        </p:spPr>
+        <p:txBody>
+          <a:bodyPr wrap="square" anchor="t" lIns="0" rIns="0" tIns="0" bIns="0">
+            <a:spAutoFit/>
+          </a:bodyPr>
+          <a:lstStyle/>
+          <a:p>
+            <a:pPr algn="l">
+              <a:spcAft>
+                <a:spcPts val="600"/>
+              </a:spcAft>
+            </a:pPr>
+            <a:r>
+              <a:rPr sz="1000" b="0">
+                <a:solidFill>
+                  <a:srgbClr val="4A5A78"/>
+                </a:solidFill>
+                <a:latin typeface="Calibri"/>
+              </a:rPr>
+              <a:t>Seazone · Hackathon Jovens Talentos AI Builder 2026</a:t>
+            </a:r>
+          </a:p>
+        </p:txBody>
+      </p:sp>
+      <p:sp>
+        <p:nvSpPr>
+          <p:cNvPr id="8" name="TextBox 7"/>
+          <p:cNvSpPr txBox="1"/>
+          <p:nvPr/>
+        </p:nvSpPr>
+        <p:spPr>
+          <a:xfrm>
+            <a:off x="11247120" y="6446520"/>
+            <a:ext cx="640080" cy="320040"/>
+          </a:xfrm>
+          <a:prstGeom prst="rect">
+            <a:avLst/>
+          </a:prstGeom>
+          <a:noFill/>
+        </p:spPr>
+        <p:txBody>
+          <a:bodyPr wrap="square" anchor="t" lIns="0" rIns="0" tIns="0" bIns="0">
+            <a:spAutoFit/>
+          </a:bodyPr>
+          <a:lstStyle/>
+          <a:p>
+            <a:pPr algn="r">
+              <a:spcAft>
+                <a:spcPts val="600"/>
+              </a:spcAft>
+            </a:pPr>
+            <a:r>
+              <a:rPr sz="1200" b="0">
+                <a:solidFill>
+                  <a:srgbClr val="4A5A78"/>
+                </a:solidFill>
+                <a:latin typeface="Calibri"/>
+              </a:rPr>
+              <a:t>5</a:t>
+            </a:r>
+          </a:p>
+        </p:txBody>
+      </p:sp>
+    </p:spTree>
+  </p:cSld>
+  <p:clrMapOvr>
+    <a:masterClrMapping/>
+  </p:clrMapOvr>
+</p:sld>
+</file>
+
+<file path=ppt/slides/slide6.xml><?xml version="1.0" encoding="utf-8"?>
+<p:sld xmlns:a="http://schemas.openxmlformats.org/drawingml/2006/main" xmlns:p="http://schemas.openxmlformats.org/presentationml/2006/main" xmlns:r="http://schemas.openxmlformats.org/officeDocument/2006/relationships">
+  <p:cSld>
+    <p:spTree>
+      <p:nvGrpSpPr>
+        <p:cNvPr id="1" name=""/>
+        <p:cNvGrpSpPr/>
+        <p:nvPr/>
+      </p:nvGrpSpPr>
+      <p:grpSpPr/>
+      <p:sp>
+        <p:nvSpPr>
+          <p:cNvPr id="2" name="Rectangle 1"/>
           <p:cNvSpPr/>
           <p:nvPr/>
         </p:nvSpPr>
         <p:spPr>
           <a:xfrm>
-            <a:off x="685800" y="1554480"/>
-            <a:ext cx="10789920" cy="1097280"/>
+            <a:off x="0" y="0"/>
+            <a:ext cx="12191695" cy="1143000"/>
           </a:xfrm>
           <a:prstGeom prst="rect">
             <a:avLst/>
           </a:prstGeom>
           <a:solidFill>
-            <a:srgbClr val="F4F7FC"/>
+            <a:srgbClr val="0E1B33"/>
           </a:solidFill>
           <a:ln>
             <a:noFill/>
@@ -9016,286 +6600,20 @@
       </p:sp>
       <p:sp>
         <p:nvSpPr>
-          <p:cNvPr id="7" name="TextBox 6"/>
-          <p:cNvSpPr txBox="1"/>
-          <p:nvPr/>
-        </p:nvSpPr>
-        <p:spPr>
-          <a:xfrm>
-            <a:off x="1005840" y="1737360"/>
-            <a:ext cx="10149840" cy="822960"/>
-          </a:xfrm>
-          <a:prstGeom prst="rect">
-            <a:avLst/>
-          </a:prstGeom>
-          <a:noFill/>
-        </p:spPr>
-        <p:txBody>
-          <a:bodyPr wrap="square" anchor="t" lIns="0" rIns="0" tIns="0" bIns="0">
-            <a:spAutoFit/>
-          </a:bodyPr>
-          <a:lstStyle/>
-          <a:p>
-            <a:pPr algn="l">
-              <a:spcAft>
-                <a:spcPts val="600"/>
-              </a:spcAft>
-            </a:pPr>
-            <a:r>
-              <a:rPr sz="2200" b="1">
-                <a:solidFill>
-                  <a:srgbClr val="0E1B33"/>
-                </a:solidFill>
-                <a:latin typeface="Calibri"/>
-              </a:rPr>
-              <a:t>Resposta: </a:t>
-            </a:r>
-          </a:p>
-          <a:p>
-            <a:pPr algn="l">
-              <a:spcAft>
-                <a:spcPts val="600"/>
-              </a:spcAft>
-            </a:pPr>
-            <a:r>
-              <a:rPr sz="2200" b="1">
-                <a:solidFill>
-                  <a:srgbClr val="0055FF"/>
-                </a:solidFill>
-                <a:latin typeface="Calibri"/>
-              </a:rPr>
-              <a:t>parcialmente validada e reposicionada — não refutada.</a:t>
-            </a:r>
-          </a:p>
-        </p:txBody>
-      </p:sp>
-      <p:sp>
-        <p:nvSpPr>
-          <p:cNvPr id="8" name="TextBox 7"/>
-          <p:cNvSpPr txBox="1"/>
-          <p:nvPr/>
-        </p:nvSpPr>
-        <p:spPr>
-          <a:xfrm>
-            <a:off x="685800" y="2926080"/>
-            <a:ext cx="10789920" cy="3291840"/>
-          </a:xfrm>
-          <a:prstGeom prst="rect">
-            <a:avLst/>
-          </a:prstGeom>
-          <a:noFill/>
-        </p:spPr>
-        <p:txBody>
-          <a:bodyPr wrap="square">
-            <a:spAutoFit/>
-          </a:bodyPr>
-          <a:lstStyle/>
-          <a:p>
-            <a:pPr>
-              <a:spcAft>
-                <a:spcPts val="1400"/>
-              </a:spcAft>
-            </a:pPr>
-            <a:r>
-              <a:rPr sz="1900" b="1">
-                <a:solidFill>
-                  <a:srgbClr val="0E1B33"/>
-                </a:solidFill>
-              </a:rPr>
-              <a:t>• O que confirma: </a:t>
-            </a:r>
-            <a:r>
-              <a:rPr sz="1900">
-                <a:solidFill>
-                  <a:srgbClr val="4A5A78"/>
-                </a:solidFill>
-              </a:rPr>
-              <a:t>unidades pequenas têm alta eficiência de capital (receita/m² e retorno).</a:t>
-            </a:r>
-          </a:p>
-          <a:p>
-            <a:pPr>
-              <a:spcAft>
-                <a:spcPts val="1400"/>
-              </a:spcAft>
-            </a:pPr>
-            <a:r>
-              <a:rPr sz="1900" b="1">
-                <a:solidFill>
-                  <a:srgbClr val="0E1B33"/>
-                </a:solidFill>
-              </a:rPr>
-              <a:t>• O que ajusta: </a:t>
-            </a:r>
-            <a:r>
-              <a:rPr sz="1900">
-                <a:solidFill>
-                  <a:srgbClr val="4A5A78"/>
-                </a:solidFill>
-              </a:rPr>
-              <a:t>o ótimo não é o 1Q, e sim o 2Q (10,3% vs 9,6% do 1Q).</a:t>
-            </a:r>
-          </a:p>
-          <a:p>
-            <a:pPr>
-              <a:spcAft>
-                <a:spcPts val="1400"/>
-              </a:spcAft>
-            </a:pPr>
-            <a:r>
-              <a:rPr sz="1900" b="1">
-                <a:solidFill>
-                  <a:srgbClr val="0E1B33"/>
-                </a:solidFill>
-              </a:rPr>
-              <a:t>• Onde: </a:t>
-            </a:r>
-            <a:r>
-              <a:rPr sz="1900">
-                <a:solidFill>
-                  <a:srgbClr val="4A5A78"/>
-                </a:solidFill>
-              </a:rPr>
-              <a:t>o melhor retorno confiável está em Morretes 2Q (11,3%), não no Centro 1Q.</a:t>
-            </a:r>
-          </a:p>
-          <a:p>
-            <a:pPr>
-              <a:spcAft>
-                <a:spcPts val="1400"/>
-              </a:spcAft>
-            </a:pPr>
-            <a:r>
-              <a:rPr sz="1900" b="1">
-                <a:solidFill>
-                  <a:srgbClr val="0E1B33"/>
-                </a:solidFill>
-              </a:rPr>
-              <a:t>• Decisão: </a:t>
-            </a:r>
-            <a:r>
-              <a:rPr sz="1900">
-                <a:solidFill>
-                  <a:srgbClr val="4A5A78"/>
-                </a:solidFill>
-              </a:rPr>
-              <a:t>investir em 2Q (não 1Q), priorizar Morretes e depois Centro; Meia Praia para receita.</a:t>
-            </a:r>
-          </a:p>
-        </p:txBody>
-      </p:sp>
-      <p:sp>
-        <p:nvSpPr>
-          <p:cNvPr id="9" name="TextBox 8"/>
-          <p:cNvSpPr txBox="1"/>
-          <p:nvPr/>
-        </p:nvSpPr>
-        <p:spPr>
-          <a:xfrm>
-            <a:off x="411480" y="6446520"/>
-            <a:ext cx="4572000" cy="320040"/>
-          </a:xfrm>
-          <a:prstGeom prst="rect">
-            <a:avLst/>
-          </a:prstGeom>
-          <a:noFill/>
-        </p:spPr>
-        <p:txBody>
-          <a:bodyPr wrap="square" anchor="t" lIns="0" rIns="0" tIns="0" bIns="0">
-            <a:spAutoFit/>
-          </a:bodyPr>
-          <a:lstStyle/>
-          <a:p>
-            <a:pPr algn="l">
-              <a:spcAft>
-                <a:spcPts val="600"/>
-              </a:spcAft>
-            </a:pPr>
-            <a:r>
-              <a:rPr sz="1000" b="0">
-                <a:solidFill>
-                  <a:srgbClr val="4A5A78"/>
-                </a:solidFill>
-                <a:latin typeface="Calibri"/>
-              </a:rPr>
-              <a:t>Seazone · Hackathon Jovens Talentos AI Builder 2026</a:t>
-            </a:r>
-          </a:p>
-        </p:txBody>
-      </p:sp>
-      <p:sp>
-        <p:nvSpPr>
-          <p:cNvPr id="10" name="TextBox 9"/>
-          <p:cNvSpPr txBox="1"/>
-          <p:nvPr/>
-        </p:nvSpPr>
-        <p:spPr>
-          <a:xfrm>
-            <a:off x="11247120" y="6446520"/>
-            <a:ext cx="640080" cy="320040"/>
-          </a:xfrm>
-          <a:prstGeom prst="rect">
-            <a:avLst/>
-          </a:prstGeom>
-          <a:noFill/>
-        </p:spPr>
-        <p:txBody>
-          <a:bodyPr wrap="square" anchor="t" lIns="0" rIns="0" tIns="0" bIns="0">
-            <a:spAutoFit/>
-          </a:bodyPr>
-          <a:lstStyle/>
-          <a:p>
-            <a:pPr algn="r">
-              <a:spcAft>
-                <a:spcPts val="600"/>
-              </a:spcAft>
-            </a:pPr>
-            <a:r>
-              <a:rPr sz="1200" b="0">
-                <a:solidFill>
-                  <a:srgbClr val="4A5A78"/>
-                </a:solidFill>
-                <a:latin typeface="Calibri"/>
-              </a:rPr>
-              <a:t>8</a:t>
-            </a:r>
-          </a:p>
-        </p:txBody>
-      </p:sp>
-    </p:spTree>
-  </p:cSld>
-  <p:clrMapOvr>
-    <a:masterClrMapping/>
-  </p:clrMapOvr>
-</p:sld>
-</file>
-
-<file path=ppt/slides/slide9.xml><?xml version="1.0" encoding="utf-8"?>
-<p:sld xmlns:a="http://schemas.openxmlformats.org/drawingml/2006/main" xmlns:p="http://schemas.openxmlformats.org/presentationml/2006/main" xmlns:r="http://schemas.openxmlformats.org/officeDocument/2006/relationships">
-  <p:cSld>
-    <p:spTree>
-      <p:nvGrpSpPr>
-        <p:cNvPr id="1" name=""/>
-        <p:cNvGrpSpPr/>
-        <p:nvPr/>
-      </p:nvGrpSpPr>
-      <p:grpSpPr/>
-      <p:sp>
-        <p:nvSpPr>
-          <p:cNvPr id="2" name="Rectangle 1"/>
+          <p:cNvPr id="3" name="Rectangle 2"/>
           <p:cNvSpPr/>
           <p:nvPr/>
         </p:nvSpPr>
         <p:spPr>
           <a:xfrm>
-            <a:off x="0" y="0"/>
-            <a:ext cx="12191695" cy="1143000"/>
+            <a:off x="411480" y="301752"/>
+            <a:ext cx="82296" cy="548640"/>
           </a:xfrm>
           <a:prstGeom prst="rect">
             <a:avLst/>
           </a:prstGeom>
           <a:solidFill>
-            <a:srgbClr val="0E1B33"/>
+            <a:srgbClr val="FC6058"/>
           </a:solidFill>
           <a:ln>
             <a:noFill/>
@@ -9326,20 +6644,309 @@
       </p:sp>
       <p:sp>
         <p:nvSpPr>
-          <p:cNvPr id="3" name="Rectangle 2"/>
+          <p:cNvPr id="4" name="TextBox 3"/>
+          <p:cNvSpPr txBox="1"/>
+          <p:nvPr/>
+        </p:nvSpPr>
+        <p:spPr>
+          <a:xfrm>
+            <a:off x="685800" y="201168"/>
+            <a:ext cx="10058400" cy="365760"/>
+          </a:xfrm>
+          <a:prstGeom prst="rect">
+            <a:avLst/>
+          </a:prstGeom>
+          <a:noFill/>
+        </p:spPr>
+        <p:txBody>
+          <a:bodyPr wrap="square" anchor="t" lIns="0" rIns="0" tIns="0" bIns="0">
+            <a:spAutoFit/>
+          </a:bodyPr>
+          <a:lstStyle/>
+          <a:p>
+            <a:pPr algn="l">
+              <a:spcAft>
+                <a:spcPts val="600"/>
+              </a:spcAft>
+            </a:pPr>
+            <a:r>
+              <a:rPr sz="1300" b="1">
+                <a:solidFill>
+                  <a:srgbClr val="A9BCDD"/>
+                </a:solidFill>
+                <a:latin typeface="Calibri"/>
+              </a:rPr>
+              <a:t>PRÓXIMOS PASSOS</a:t>
+            </a:r>
+          </a:p>
+        </p:txBody>
+      </p:sp>
+      <p:sp>
+        <p:nvSpPr>
+          <p:cNvPr id="5" name="TextBox 4"/>
+          <p:cNvSpPr txBox="1"/>
+          <p:nvPr/>
+        </p:nvSpPr>
+        <p:spPr>
+          <a:xfrm>
+            <a:off x="685800" y="502920"/>
+            <a:ext cx="10515600" cy="640080"/>
+          </a:xfrm>
+          <a:prstGeom prst="rect">
+            <a:avLst/>
+          </a:prstGeom>
+          <a:noFill/>
+        </p:spPr>
+        <p:txBody>
+          <a:bodyPr wrap="square" anchor="t" lIns="0" rIns="0" tIns="0" bIns="0">
+            <a:spAutoFit/>
+          </a:bodyPr>
+          <a:lstStyle/>
+          <a:p>
+            <a:pPr algn="l">
+              <a:spcAft>
+                <a:spcPts val="600"/>
+              </a:spcAft>
+            </a:pPr>
+            <a:r>
+              <a:rPr sz="3000" b="1">
+                <a:solidFill>
+                  <a:srgbClr val="FFFFFF"/>
+                </a:solidFill>
+                <a:latin typeface="Calibri"/>
+              </a:rPr>
+              <a:t>O que faria com mais uma semana</a:t>
+            </a:r>
+          </a:p>
+        </p:txBody>
+      </p:sp>
+      <p:sp>
+        <p:nvSpPr>
+          <p:cNvPr id="6" name="TextBox 5"/>
+          <p:cNvSpPr txBox="1"/>
+          <p:nvPr/>
+        </p:nvSpPr>
+        <p:spPr>
+          <a:xfrm>
+            <a:off x="685800" y="1554480"/>
+            <a:ext cx="10789920" cy="4389120"/>
+          </a:xfrm>
+          <a:prstGeom prst="rect">
+            <a:avLst/>
+          </a:prstGeom>
+          <a:noFill/>
+        </p:spPr>
+        <p:txBody>
+          <a:bodyPr wrap="square">
+            <a:spAutoFit/>
+          </a:bodyPr>
+          <a:lstStyle/>
+          <a:p>
+            <a:pPr>
+              <a:spcAft>
+                <a:spcPts val="1400"/>
+              </a:spcAft>
+            </a:pPr>
+            <a:r>
+              <a:rPr sz="1900" b="1">
+                <a:solidFill>
+                  <a:srgbClr val="0E1B33"/>
+                </a:solidFill>
+              </a:rPr>
+              <a:t>• Ano completo: </a:t>
+            </a:r>
+            <a:r>
+              <a:rPr sz="1900">
+                <a:solidFill>
+                  <a:srgbClr val="4A5A78"/>
+                </a:solidFill>
+              </a:rPr>
+              <a:t>calibrar sazonalidade real e ocupação de inverno — elimina a principal limitação.</a:t>
+            </a:r>
+          </a:p>
+          <a:p>
+            <a:pPr>
+              <a:spcAft>
+                <a:spcPts val="1400"/>
+              </a:spcAft>
+            </a:pPr>
+            <a:r>
+              <a:rPr sz="1900" b="1">
+                <a:solidFill>
+                  <a:srgbClr val="0E1B33"/>
+                </a:solidFill>
+              </a:rPr>
+              <a:t>• Custos operacionais: </a:t>
+            </a:r>
+            <a:r>
+              <a:rPr sz="1900">
+                <a:solidFill>
+                  <a:srgbClr val="4A5A78"/>
+                </a:solidFill>
+              </a:rPr>
+              <a:t>transformar 'líquido de encargos' em NOI/cap rate completo.</a:t>
+            </a:r>
+          </a:p>
+          <a:p>
+            <a:pPr>
+              <a:spcAft>
+                <a:spcPts val="1400"/>
+              </a:spcAft>
+            </a:pPr>
+            <a:r>
+              <a:rPr sz="1900" b="1">
+                <a:solidFill>
+                  <a:srgbClr val="0E1B33"/>
+                </a:solidFill>
+              </a:rPr>
+              <a:t>• Modelo mais robusto + validação externa: </a:t>
+            </a:r>
+            <a:r>
+              <a:rPr sz="1900">
+                <a:solidFill>
+                  <a:srgbClr val="4A5A78"/>
+                </a:solidFill>
+              </a:rPr>
+              <a:t>sensibilidade do limiar de confiança e teste da tese de Morretes com dados censitários.</a:t>
+            </a:r>
+          </a:p>
+          <a:p>
+            <a:pPr>
+              <a:spcAft>
+                <a:spcPts val="1400"/>
+              </a:spcAft>
+            </a:pPr>
+            <a:r>
+              <a:rPr sz="1900" b="1">
+                <a:solidFill>
+                  <a:srgbClr val="0E1B33"/>
+                </a:solidFill>
+              </a:rPr>
+              <a:t>• Benchmark Seazone: </a:t>
+            </a:r>
+            <a:r>
+              <a:rPr sz="1900">
+                <a:solidFill>
+                  <a:srgbClr val="4A5A78"/>
+                </a:solidFill>
+              </a:rPr>
+              <a:t>comparar com padrões de operação da empresa.</a:t>
+            </a:r>
+          </a:p>
+        </p:txBody>
+      </p:sp>
+      <p:sp>
+        <p:nvSpPr>
+          <p:cNvPr id="7" name="TextBox 6"/>
+          <p:cNvSpPr txBox="1"/>
+          <p:nvPr/>
+        </p:nvSpPr>
+        <p:spPr>
+          <a:xfrm>
+            <a:off x="411480" y="6446520"/>
+            <a:ext cx="4572000" cy="320040"/>
+          </a:xfrm>
+          <a:prstGeom prst="rect">
+            <a:avLst/>
+          </a:prstGeom>
+          <a:noFill/>
+        </p:spPr>
+        <p:txBody>
+          <a:bodyPr wrap="square" anchor="t" lIns="0" rIns="0" tIns="0" bIns="0">
+            <a:spAutoFit/>
+          </a:bodyPr>
+          <a:lstStyle/>
+          <a:p>
+            <a:pPr algn="l">
+              <a:spcAft>
+                <a:spcPts val="600"/>
+              </a:spcAft>
+            </a:pPr>
+            <a:r>
+              <a:rPr sz="1000" b="0">
+                <a:solidFill>
+                  <a:srgbClr val="4A5A78"/>
+                </a:solidFill>
+                <a:latin typeface="Calibri"/>
+              </a:rPr>
+              <a:t>Seazone · Hackathon Jovens Talentos AI Builder 2026</a:t>
+            </a:r>
+          </a:p>
+        </p:txBody>
+      </p:sp>
+      <p:sp>
+        <p:nvSpPr>
+          <p:cNvPr id="8" name="TextBox 7"/>
+          <p:cNvSpPr txBox="1"/>
+          <p:nvPr/>
+        </p:nvSpPr>
+        <p:spPr>
+          <a:xfrm>
+            <a:off x="11247120" y="6446520"/>
+            <a:ext cx="640080" cy="320040"/>
+          </a:xfrm>
+          <a:prstGeom prst="rect">
+            <a:avLst/>
+          </a:prstGeom>
+          <a:noFill/>
+        </p:spPr>
+        <p:txBody>
+          <a:bodyPr wrap="square" anchor="t" lIns="0" rIns="0" tIns="0" bIns="0">
+            <a:spAutoFit/>
+          </a:bodyPr>
+          <a:lstStyle/>
+          <a:p>
+            <a:pPr algn="r">
+              <a:spcAft>
+                <a:spcPts val="600"/>
+              </a:spcAft>
+            </a:pPr>
+            <a:r>
+              <a:rPr sz="1200" b="0">
+                <a:solidFill>
+                  <a:srgbClr val="4A5A78"/>
+                </a:solidFill>
+                <a:latin typeface="Calibri"/>
+              </a:rPr>
+              <a:t>6</a:t>
+            </a:r>
+          </a:p>
+        </p:txBody>
+      </p:sp>
+    </p:spTree>
+  </p:cSld>
+  <p:clrMapOvr>
+    <a:masterClrMapping/>
+  </p:clrMapOvr>
+</p:sld>
+</file>
+
+<file path=ppt/slides/slide7.xml><?xml version="1.0" encoding="utf-8"?>
+<p:sld xmlns:a="http://schemas.openxmlformats.org/drawingml/2006/main" xmlns:p="http://schemas.openxmlformats.org/presentationml/2006/main" xmlns:r="http://schemas.openxmlformats.org/officeDocument/2006/relationships">
+  <p:cSld>
+    <p:spTree>
+      <p:nvGrpSpPr>
+        <p:cNvPr id="1" name=""/>
+        <p:cNvGrpSpPr/>
+        <p:nvPr/>
+      </p:nvGrpSpPr>
+      <p:grpSpPr/>
+      <p:sp>
+        <p:nvSpPr>
+          <p:cNvPr id="2" name="Rectangle 1"/>
           <p:cNvSpPr/>
           <p:nvPr/>
         </p:nvSpPr>
         <p:spPr>
           <a:xfrm>
-            <a:off x="411480" y="301752"/>
-            <a:ext cx="82296" cy="548640"/>
+            <a:off x="0" y="0"/>
+            <a:ext cx="12191695" cy="6858000"/>
           </a:xfrm>
           <a:prstGeom prst="rect">
             <a:avLst/>
           </a:prstGeom>
           <a:solidFill>
-            <a:srgbClr val="FC6058"/>
+            <a:srgbClr val="0E1B33"/>
           </a:solidFill>
           <a:ln>
             <a:noFill/>
@@ -9370,14 +6977,58 @@
       </p:sp>
       <p:sp>
         <p:nvSpPr>
+          <p:cNvPr id="3" name="Rectangle 2"/>
+          <p:cNvSpPr/>
+          <p:nvPr/>
+        </p:nvSpPr>
+        <p:spPr>
+          <a:xfrm>
+            <a:off x="0" y="5669280"/>
+            <a:ext cx="12191695" cy="1188720"/>
+          </a:xfrm>
+          <a:prstGeom prst="rect">
+            <a:avLst/>
+          </a:prstGeom>
+          <a:solidFill>
+            <a:srgbClr val="0055FF"/>
+          </a:solidFill>
+          <a:ln>
+            <a:noFill/>
+          </a:ln>
+          <a:effectLst/>
+        </p:spPr>
+        <p:style>
+          <a:lnRef idx="1">
+            <a:schemeClr val="accent1"/>
+          </a:lnRef>
+          <a:fillRef idx="3">
+            <a:schemeClr val="accent1"/>
+          </a:fillRef>
+          <a:effectRef idx="2">
+            <a:schemeClr val="accent1"/>
+          </a:effectRef>
+          <a:fontRef idx="minor">
+            <a:schemeClr val="lt1"/>
+          </a:fontRef>
+        </p:style>
+        <p:txBody>
+          <a:bodyPr rtlCol="0" anchor="ctr"/>
+          <a:lstStyle/>
+          <a:p>
+            <a:pPr algn="ctr"/>
+          </a:p>
+        </p:txBody>
+      </p:sp>
+      <p:sp>
+        <p:nvSpPr>
           <p:cNvPr id="4" name="TextBox 3"/>
           <p:cNvSpPr txBox="1"/>
           <p:nvPr/>
         </p:nvSpPr>
         <p:spPr>
           <a:xfrm>
-            <a:off x="685800" y="201168"/>
-            <a:ext cx="10058400" cy="365760"/>
+            <a:off x="822960" y="822960"/>
+            <a:ext cx="10515600" cy="457200"/>
           </a:xfrm>
           <a:prstGeom prst="rect">
             <a:avLst/>
@@ -9396,13 +7047,13 @@
               </a:spcAft>
             </a:pPr>
             <a:r>
-              <a:rPr sz="1300" b="1">
+              <a:rPr sz="1400" b="1">
                 <a:solidFill>
                   <a:srgbClr val="A9BCDD"/>
                 </a:solidFill>
                 <a:latin typeface="Calibri"/>
               </a:rPr>
-              <a:t>PROCESSO</a:t>
+              <a:t>CONCLUSÃO</a:t>
             </a:r>
           </a:p>
         </p:txBody>
@@ -9415,8 +7066,8 @@
         </p:nvSpPr>
         <p:spPr>
           <a:xfrm>
-            <a:off x="685800" y="502920"/>
-            <a:ext cx="10515600" cy="640080"/>
+            <a:off x="822960" y="1280160"/>
+            <a:ext cx="10515600" cy="2011680"/>
           </a:xfrm>
           <a:prstGeom prst="rect">
             <a:avLst/>
@@ -9435,176 +7086,15 @@
               </a:spcAft>
             </a:pPr>
             <a:r>
-              <a:rPr sz="3000" b="1">
+              <a:rPr sz="4000" b="1">
                 <a:solidFill>
                   <a:srgbClr val="FFFFFF"/>
                 </a:solidFill>
                 <a:latin typeface="Calibri"/>
               </a:rPr>
-              <a:t>Como a IA foi usada</a:t>
-            </a:r>
-          </a:p>
-        </p:txBody>
-      </p:sp>
-      <p:sp>
-        <p:nvSpPr>
-          <p:cNvPr id="6" name="TextBox 5"/>
-          <p:cNvSpPr txBox="1"/>
-          <p:nvPr/>
-        </p:nvSpPr>
-        <p:spPr>
-          <a:xfrm>
-            <a:off x="685800" y="1463040"/>
-            <a:ext cx="10789920" cy="4023360"/>
-          </a:xfrm>
-          <a:prstGeom prst="rect">
-            <a:avLst/>
-          </a:prstGeom>
-          <a:noFill/>
-        </p:spPr>
-        <p:txBody>
-          <a:bodyPr wrap="square">
-            <a:spAutoFit/>
-          </a:bodyPr>
-          <a:lstStyle/>
-          <a:p>
-            <a:pPr>
-              <a:spcAft>
-                <a:spcPts val="1200"/>
-              </a:spcAft>
-            </a:pPr>
-            <a:r>
-              <a:rPr sz="1800" b="1">
-                <a:solidFill>
-                  <a:srgbClr val="0E1B33"/>
-                </a:solidFill>
-              </a:rPr>
-              <a:t>• Ferramenta colaborativa, não substituta: </a:t>
-            </a:r>
-            <a:r>
-              <a:rPr sz="1800">
-                <a:solidFill>
-                  <a:srgbClr val="4A5A78"/>
-                </a:solidFill>
-              </a:rPr>
-              <a:t>a IA testou hipóteses e o analista decidiu cada critério.</a:t>
-            </a:r>
-          </a:p>
-          <a:p>
-            <a:pPr>
-              <a:spcAft>
-                <a:spcPts val="1200"/>
-              </a:spcAft>
-            </a:pPr>
-            <a:r>
-              <a:rPr sz="1800" b="1">
-                <a:solidFill>
-                  <a:srgbClr val="0E1B33"/>
-                </a:solidFill>
-              </a:rPr>
-              <a:t>• Ponto de virada (Price_AV): </a:t>
-            </a:r>
-            <a:r>
-              <a:rPr sz="1800">
-                <a:solidFill>
-                  <a:srgbClr val="4A5A78"/>
-                </a:solidFill>
-              </a:rPr>
-              <a:t>diagnóstico mostrou disponibilidade, não ocupação → modelamos por cenários.</a:t>
-            </a:r>
-          </a:p>
-          <a:p>
-            <a:pPr>
-              <a:spcAft>
-                <a:spcPts val="1200"/>
-              </a:spcAft>
-            </a:pPr>
-            <a:r>
-              <a:rPr sz="1800" b="1">
-                <a:solidFill>
-                  <a:srgbClr val="0E1B33"/>
-                </a:solidFill>
-              </a:rPr>
-              <a:t>• Qualidade: </a:t>
-            </a:r>
-            <a:r>
-              <a:rPr sz="1800">
-                <a:solidFill>
-                  <a:srgbClr val="4A5A78"/>
-                </a:solidFill>
-              </a:rPr>
-              <a:t>detectou inconsistências (owner duplicado, n pequeno, colinearidade) e auditou o relatório como revisor sênior.</a:t>
-            </a:r>
-          </a:p>
-          <a:p>
-            <a:pPr>
-              <a:spcAft>
-                <a:spcPts val="1200"/>
-              </a:spcAft>
-            </a:pPr>
-            <a:r>
-              <a:rPr sz="1800" b="1">
-                <a:solidFill>
-                  <a:srgbClr val="0E1B33"/>
-                </a:solidFill>
-              </a:rPr>
-              <a:t>• Decisões do analista: </a:t>
-            </a:r>
-            <a:r>
-              <a:rPr sz="1800">
-                <a:solidFill>
-                  <a:srgbClr val="4A5A78"/>
-                </a:solidFill>
-              </a:rPr>
-              <a:t>limiar de R$ 3.000, taxas 40/55/70%, filtros do VivaReal, nomenclatura.</a:t>
-            </a:r>
-          </a:p>
-          <a:p>
-            <a:pPr>
-              <a:spcAft>
-                <a:spcPts val="1200"/>
-              </a:spcAft>
-            </a:pPr>
-            <a:r>
-              <a:rPr sz="1800" b="1">
-                <a:solidFill>
-                  <a:srgbClr val="0E1B33"/>
-                </a:solidFill>
-              </a:rPr>
-              <a:t>• Rastreabilidade: </a:t>
-            </a:r>
-            <a:r>
-              <a:rPr sz="1800">
-                <a:solidFill>
-                  <a:srgbClr val="4A5A78"/>
-                </a:solidFill>
-              </a:rPr>
-              <a:t>tudo em ai-log/ (conversa completa em texto) e scripts 01–15.</a:t>
-            </a:r>
-          </a:p>
-        </p:txBody>
-      </p:sp>
-      <p:sp>
-        <p:nvSpPr>
-          <p:cNvPr id="7" name="TextBox 6"/>
-          <p:cNvSpPr txBox="1"/>
-          <p:nvPr/>
-        </p:nvSpPr>
-        <p:spPr>
-          <a:xfrm>
-            <a:off x="411480" y="6446520"/>
-            <a:ext cx="4572000" cy="320040"/>
-          </a:xfrm>
-          <a:prstGeom prst="rect">
-            <a:avLst/>
-          </a:prstGeom>
-          <a:noFill/>
-        </p:spPr>
-        <p:txBody>
-          <a:bodyPr wrap="square" anchor="t" lIns="0" rIns="0" tIns="0" bIns="0">
-            <a:spAutoFit/>
-          </a:bodyPr>
-          <a:lstStyle/>
+              <a:t>Investir em apartamentos 2Q,</a:t>
+            </a:r>
+          </a:p>
           <a:p>
             <a:pPr algn="l">
               <a:spcAft>
@@ -9612,6 +7102,155 @@
               </a:spcAft>
             </a:pPr>
             <a:r>
+              <a:rPr sz="4000" b="1">
+                <a:solidFill>
+                  <a:srgbClr val="FC6058"/>
+                </a:solidFill>
+                <a:latin typeface="Calibri"/>
+              </a:rPr>
+              <a:t>começando por Morretes.</a:t>
+            </a:r>
+          </a:p>
+        </p:txBody>
+      </p:sp>
+      <p:sp>
+        <p:nvSpPr>
+          <p:cNvPr id="6" name="TextBox 5"/>
+          <p:cNvSpPr txBox="1"/>
+          <p:nvPr/>
+        </p:nvSpPr>
+        <p:spPr>
+          <a:xfrm>
+            <a:off x="822960" y="3291840"/>
+            <a:ext cx="10515600" cy="2011680"/>
+          </a:xfrm>
+          <a:prstGeom prst="rect">
+            <a:avLst/>
+          </a:prstGeom>
+          <a:noFill/>
+        </p:spPr>
+        <p:txBody>
+          <a:bodyPr wrap="square" anchor="t" lIns="0" rIns="0" tIns="0" bIns="0">
+            <a:spAutoFit/>
+          </a:bodyPr>
+          <a:lstStyle/>
+          <a:p>
+            <a:pPr algn="l">
+              <a:spcAft>
+                <a:spcPts val="600"/>
+              </a:spcAft>
+            </a:pPr>
+            <a:r>
+              <a:rPr sz="2000" b="0">
+                <a:solidFill>
+                  <a:srgbClr val="D6DFF0"/>
+                </a:solidFill>
+                <a:latin typeface="Calibri"/>
+              </a:rPr>
+              <a:t>10,8% a.a. líquido de encargos (55% de ocupação), com ticket acessível e alta confiabilidade.</a:t>
+            </a:r>
+          </a:p>
+          <a:p>
+            <a:pPr algn="l">
+              <a:spcAft>
+                <a:spcPts val="600"/>
+              </a:spcAft>
+            </a:pPr>
+            <a:r>
+              <a:rPr sz="1700" b="0">
+                <a:solidFill>
+                  <a:srgbClr val="A9BCDD"/>
+                </a:solidFill>
+                <a:latin typeface="Calibri"/>
+              </a:rPr>
+              <a:t>Tese dos compactos: validada na intuição (eficiência), ajustada na execução (2Q, Morretes).</a:t>
+            </a:r>
+          </a:p>
+        </p:txBody>
+      </p:sp>
+      <p:sp>
+        <p:nvSpPr>
+          <p:cNvPr id="7" name="TextBox 6"/>
+          <p:cNvSpPr txBox="1"/>
+          <p:nvPr/>
+        </p:nvSpPr>
+        <p:spPr>
+          <a:xfrm>
+            <a:off x="822960" y="5943600"/>
+            <a:ext cx="10515600" cy="731520"/>
+          </a:xfrm>
+          <a:prstGeom prst="rect">
+            <a:avLst/>
+          </a:prstGeom>
+          <a:noFill/>
+        </p:spPr>
+        <p:txBody>
+          <a:bodyPr wrap="square" anchor="t" lIns="0" rIns="0" tIns="0" bIns="0">
+            <a:spAutoFit/>
+          </a:bodyPr>
+          <a:lstStyle/>
+          <a:p>
+            <a:pPr algn="l">
+              <a:spcAft>
+                <a:spcPts val="600"/>
+              </a:spcAft>
+            </a:pPr>
+            <a:r>
+              <a:rPr sz="2200" b="1">
+                <a:solidFill>
+                  <a:srgbClr val="FFFFFF"/>
+                </a:solidFill>
+                <a:latin typeface="Calibri"/>
+              </a:rPr>
+              <a:t>Obrigado!  </a:t>
+            </a:r>
+          </a:p>
+          <a:p>
+            <a:pPr algn="l">
+              <a:spcAft>
+                <a:spcPts val="600"/>
+              </a:spcAft>
+            </a:pPr>
+            <a:r>
+              <a:rPr sz="1400" b="0">
+                <a:solidFill>
+                  <a:srgbClr val="FFFFFF"/>
+                </a:solidFill>
+                <a:latin typeface="Calibri"/>
+              </a:rPr>
+              <a:t>Relatório: relatorio.md · Código: scripts/ · Processo: ai-log/</a:t>
+            </a:r>
+          </a:p>
+        </p:txBody>
+      </p:sp>
+      <p:sp>
+        <p:nvSpPr>
+          <p:cNvPr id="8" name="TextBox 7"/>
+          <p:cNvSpPr txBox="1"/>
+          <p:nvPr/>
+        </p:nvSpPr>
+        <p:spPr>
+          <a:xfrm>
+            <a:off x="411480" y="6446520"/>
+            <a:ext cx="4572000" cy="320040"/>
+          </a:xfrm>
+          <a:prstGeom prst="rect">
+            <a:avLst/>
+          </a:prstGeom>
+          <a:noFill/>
+        </p:spPr>
+        <p:txBody>
+          <a:bodyPr wrap="square" anchor="t" lIns="0" rIns="0" tIns="0" bIns="0">
+            <a:spAutoFit/>
+          </a:bodyPr>
+          <a:lstStyle/>
+          <a:p>
+            <a:pPr algn="l">
+              <a:spcAft>
+                <a:spcPts val="600"/>
+              </a:spcAft>
+            </a:pPr>
+            <a:r>
               <a:rPr sz="1000" b="0">
                 <a:solidFill>
                   <a:srgbClr val="4A5A78"/>
@@ -9625,7 +7264,7 @@
       </p:sp>
       <p:sp>
         <p:nvSpPr>
-          <p:cNvPr id="8" name="TextBox 7"/>
+          <p:cNvPr id="9" name="TextBox 8"/>
           <p:cNvSpPr txBox="1"/>
           <p:nvPr/>
         </p:nvSpPr>
@@ -9657,7 +7296,7 @@
                 </a:solidFill>
                 <a:latin typeface="Calibri"/>
               </a:rPr>
-              <a:t>9</a:t>
+              <a:t>7</a:t>
             </a:r>
           </a:p>
         </p:txBody>
